--- a/SQL_Modern_DW.pptx
+++ b/SQL_Modern_DW.pptx
@@ -5,18 +5,19 @@
     <p:sldMasterId id="2147483648" r:id="rId1"/>
   </p:sldMasterIdLst>
   <p:notesMasterIdLst>
-    <p:notesMasterId r:id="rId11"/>
+    <p:notesMasterId r:id="rId12"/>
   </p:notesMasterIdLst>
   <p:sldIdLst>
-    <p:sldId id="334" r:id="rId2"/>
+    <p:sldId id="335" r:id="rId2"/>
     <p:sldId id="338" r:id="rId3"/>
-    <p:sldId id="333" r:id="rId4"/>
-    <p:sldId id="335" r:id="rId5"/>
-    <p:sldId id="337" r:id="rId6"/>
+    <p:sldId id="337" r:id="rId4"/>
+    <p:sldId id="333" r:id="rId5"/>
+    <p:sldId id="334" r:id="rId6"/>
     <p:sldId id="341" r:id="rId7"/>
     <p:sldId id="257" r:id="rId8"/>
-    <p:sldId id="340" r:id="rId9"/>
-    <p:sldId id="339" r:id="rId10"/>
+    <p:sldId id="342" r:id="rId9"/>
+    <p:sldId id="340" r:id="rId10"/>
+    <p:sldId id="339" r:id="rId11"/>
   </p:sldIdLst>
   <p:sldSz cx="12192000" cy="6858000"/>
   <p:notesSz cx="6858000" cy="9144000"/>
@@ -3688,10 +3689,10 @@
       </p:grpSpPr>
       <p:sp>
         <p:nvSpPr>
-          <p:cNvPr id="4" name="TextBox 3">
-            <a:extLst>
-              <a:ext uri="{FF2B5EF4-FFF2-40B4-BE49-F238E27FC236}">
-                <a16:creationId xmlns:a16="http://schemas.microsoft.com/office/drawing/2014/main" id="{D1E58F78-8F27-2D4A-BD36-154CD23B3E50}"/>
+          <p:cNvPr id="2" name="TextBox 1">
+            <a:extLst>
+              <a:ext uri="{FF2B5EF4-FFF2-40B4-BE49-F238E27FC236}">
+                <a16:creationId xmlns:a16="http://schemas.microsoft.com/office/drawing/2014/main" id="{1FF97A56-4D4A-3F47-9FFF-C6919AE57058}"/>
               </a:ext>
             </a:extLst>
           </p:cNvPr>
@@ -3700,8 +3701,8 @@
         </p:nvSpPr>
         <p:spPr>
           <a:xfrm>
-            <a:off x="0" y="188301"/>
-            <a:ext cx="5082639" cy="646331"/>
+            <a:off x="142504" y="118753"/>
+            <a:ext cx="3857995" cy="523220"/>
           </a:xfrm>
           <a:prstGeom prst="rect">
             <a:avLst/>
@@ -3714,52 +3715,66 @@
           </a:bodyPr>
           <a:lstStyle/>
           <a:p>
-            <a:pPr algn="ctr"/>
-            <a:r>
-              <a:rPr lang="en-US" sz="3600" b="1" dirty="0"/>
-              <a:t>OLAP Cube – Rise and Fall</a:t>
-            </a:r>
-          </a:p>
-        </p:txBody>
-      </p:sp>
-      <p:sp>
-        <p:nvSpPr>
-          <p:cNvPr id="5" name="TextBox 4">
-            <a:extLst>
-              <a:ext uri="{FF2B5EF4-FFF2-40B4-BE49-F238E27FC236}">
-                <a16:creationId xmlns:a16="http://schemas.microsoft.com/office/drawing/2014/main" id="{9ECF6344-25D1-214F-A75E-373DADD0E10F}"/>
-              </a:ext>
-            </a:extLst>
-          </p:cNvPr>
-          <p:cNvSpPr txBox="1"/>
+            <a:r>
+              <a:rPr lang="en-US" sz="2800" b="1" dirty="0"/>
+              <a:t>Kimball DW Framework</a:t>
+            </a:r>
+          </a:p>
+        </p:txBody>
+      </p:sp>
+      <p:pic>
+        <p:nvPicPr>
+          <p:cNvPr id="1028" name="Picture 4" descr="Kimball Group | Dimensional Data Warehousing Experts">
+            <a:extLst>
+              <a:ext uri="{FF2B5EF4-FFF2-40B4-BE49-F238E27FC236}">
+                <a16:creationId xmlns:a16="http://schemas.microsoft.com/office/drawing/2014/main" id="{54BE1611-AB11-B843-B335-0B1AD870C097}"/>
+              </a:ext>
+            </a:extLst>
+          </p:cNvPr>
+          <p:cNvPicPr>
+            <a:picLocks noChangeAspect="1" noChangeArrowheads="1"/>
+          </p:cNvPicPr>
           <p:nvPr/>
-        </p:nvSpPr>
-        <p:spPr>
-          <a:xfrm>
-            <a:off x="13086608" y="6543304"/>
-            <a:ext cx="184731" cy="369332"/>
+        </p:nvPicPr>
+        <p:blipFill>
+          <a:blip r:embed="rId2" cstate="email">
+            <a:extLst>
+              <a:ext uri="{28A0092B-C50C-407E-A947-70E740481C1C}">
+                <a14:useLocalDpi xmlns:a14="http://schemas.microsoft.com/office/drawing/2010/main"/>
+              </a:ext>
+            </a:extLst>
+          </a:blip>
+          <a:srcRect/>
+          <a:stretch>
+            <a:fillRect/>
+          </a:stretch>
+        </p:blipFill>
+        <p:spPr bwMode="auto">
+          <a:xfrm>
+            <a:off x="2591645" y="781336"/>
+            <a:ext cx="1720112" cy="2013789"/>
           </a:xfrm>
           <a:prstGeom prst="rect">
             <a:avLst/>
           </a:prstGeom>
           <a:noFill/>
-        </p:spPr>
-        <p:txBody>
-          <a:bodyPr wrap="none" rtlCol="0">
-            <a:spAutoFit/>
-          </a:bodyPr>
-          <a:lstStyle/>
-          <a:p>
-            <a:endParaRPr lang="en-US" dirty="0"/>
-          </a:p>
-        </p:txBody>
-      </p:sp>
-      <p:sp>
-        <p:nvSpPr>
-          <p:cNvPr id="6" name="TextBox 5">
-            <a:extLst>
-              <a:ext uri="{FF2B5EF4-FFF2-40B4-BE49-F238E27FC236}">
-                <a16:creationId xmlns:a16="http://schemas.microsoft.com/office/drawing/2014/main" id="{7A5EA9DD-F532-E844-9109-9810BD2F6D66}"/>
+          <a:extLst>
+            <a:ext uri="{909E8E84-426E-40DD-AFC4-6F175D3DCCD1}">
+              <a14:hiddenFill xmlns:a14="http://schemas.microsoft.com/office/drawing/2010/main">
+                <a:solidFill>
+                  <a:srgbClr val="FFFFFF"/>
+                </a:solidFill>
+              </a14:hiddenFill>
+            </a:ext>
+          </a:extLst>
+        </p:spPr>
+      </p:pic>
+      <p:sp>
+        <p:nvSpPr>
+          <p:cNvPr id="3" name="TextBox 2">
+            <a:extLst>
+              <a:ext uri="{FF2B5EF4-FFF2-40B4-BE49-F238E27FC236}">
+                <a16:creationId xmlns:a16="http://schemas.microsoft.com/office/drawing/2014/main" id="{CB6AC39B-5121-BE4B-B106-D28C9291FF2B}"/>
               </a:ext>
             </a:extLst>
           </p:cNvPr>
@@ -3768,8 +3783,8 @@
         </p:nvSpPr>
         <p:spPr>
           <a:xfrm>
-            <a:off x="6207450" y="188301"/>
-            <a:ext cx="5082639" cy="738664"/>
+            <a:off x="1949557" y="2820188"/>
+            <a:ext cx="2901843" cy="584775"/>
           </a:xfrm>
           <a:prstGeom prst="rect">
             <a:avLst/>
@@ -3783,51 +3798,137 @@
           <a:lstStyle/>
           <a:p>
             <a:r>
-              <a:rPr lang="en-US" sz="1400" dirty="0"/>
-              <a:t>Very good article:</a:t>
-            </a:r>
-          </a:p>
-          <a:p>
-            <a:r>
-              <a:rPr lang="en-US" sz="1400" dirty="0"/>
-              <a:t>The Rise and Fall of the OLAP Cube - by Cedric Chin (2020)</a:t>
-            </a:r>
-          </a:p>
-          <a:p>
-            <a:r>
-              <a:rPr lang="en-US" sz="1400" dirty="0">
-                <a:hlinkClick r:id="rId2"/>
+              <a:rPr lang="en-US" sz="1600" dirty="0"/>
+              <a:t>Kimball Group – closed in 2015</a:t>
+            </a:r>
+          </a:p>
+          <a:p>
+            <a:r>
+              <a:rPr lang="en-US" sz="1600" dirty="0">
+                <a:hlinkClick r:id="rId3"/>
               </a:rPr>
-              <a:t>https://www.holistics.io/blog/the-rise-and-fall-of-the-olap-cube/</a:t>
-            </a:r>
-            <a:r>
-              <a:rPr lang="en-US" sz="1400" dirty="0"/>
+              <a:t>https://www.kimballgroup.com/</a:t>
+            </a:r>
+            <a:r>
+              <a:rPr lang="en-US" sz="1600" dirty="0"/>
               <a:t> </a:t>
             </a:r>
           </a:p>
         </p:txBody>
       </p:sp>
-      <p:sp>
-        <p:nvSpPr>
-          <p:cNvPr id="7" name="TextBox 6">
-            <a:extLst>
-              <a:ext uri="{FF2B5EF4-FFF2-40B4-BE49-F238E27FC236}">
-                <a16:creationId xmlns:a16="http://schemas.microsoft.com/office/drawing/2014/main" id="{76F64F69-1BC7-CC48-841C-6FFCC4154296}"/>
-              </a:ext>
-            </a:extLst>
-          </p:cNvPr>
-          <p:cNvSpPr txBox="1"/>
+      <p:pic>
+        <p:nvPicPr>
+          <p:cNvPr id="1032" name="Picture 8">
+            <a:extLst>
+              <a:ext uri="{FF2B5EF4-FFF2-40B4-BE49-F238E27FC236}">
+                <a16:creationId xmlns:a16="http://schemas.microsoft.com/office/drawing/2014/main" id="{25FB8E3B-0DC1-B943-B985-7D05DDC29557}"/>
+              </a:ext>
+            </a:extLst>
+          </p:cNvPr>
+          <p:cNvPicPr>
+            <a:picLocks noChangeAspect="1" noChangeArrowheads="1"/>
+          </p:cNvPicPr>
           <p:nvPr/>
-        </p:nvSpPr>
-        <p:spPr>
-          <a:xfrm>
-            <a:off x="1030310" y="1464991"/>
-            <a:ext cx="9697791" cy="5078313"/>
+        </p:nvPicPr>
+        <p:blipFill>
+          <a:blip r:embed="rId4" cstate="email">
+            <a:extLst>
+              <a:ext uri="{28A0092B-C50C-407E-A947-70E740481C1C}">
+                <a14:useLocalDpi xmlns:a14="http://schemas.microsoft.com/office/drawing/2010/main"/>
+              </a:ext>
+            </a:extLst>
+          </a:blip>
+          <a:srcRect/>
+          <a:stretch>
+            <a:fillRect/>
+          </a:stretch>
+        </p:blipFill>
+        <p:spPr bwMode="auto">
+          <a:xfrm>
+            <a:off x="142504" y="4160462"/>
+            <a:ext cx="1807053" cy="2277069"/>
           </a:xfrm>
           <a:prstGeom prst="rect">
             <a:avLst/>
           </a:prstGeom>
           <a:noFill/>
+          <a:extLst>
+            <a:ext uri="{909E8E84-426E-40DD-AFC4-6F175D3DCCD1}">
+              <a14:hiddenFill xmlns:a14="http://schemas.microsoft.com/office/drawing/2010/main">
+                <a:solidFill>
+                  <a:srgbClr val="FFFFFF"/>
+                </a:solidFill>
+              </a14:hiddenFill>
+            </a:ext>
+          </a:extLst>
+        </p:spPr>
+      </p:pic>
+      <p:pic>
+        <p:nvPicPr>
+          <p:cNvPr id="1034" name="Picture 10" descr="Kimball's Data Warehouse Toolkit Classics, 3 Volume Set">
+            <a:extLst>
+              <a:ext uri="{FF2B5EF4-FFF2-40B4-BE49-F238E27FC236}">
+                <a16:creationId xmlns:a16="http://schemas.microsoft.com/office/drawing/2014/main" id="{E667604D-59E9-1345-9E47-35276E3959DF}"/>
+              </a:ext>
+            </a:extLst>
+          </p:cNvPr>
+          <p:cNvPicPr>
+            <a:picLocks noChangeAspect="1" noChangeArrowheads="1"/>
+          </p:cNvPicPr>
+          <p:nvPr/>
+        </p:nvPicPr>
+        <p:blipFill rotWithShape="1">
+          <a:blip r:embed="rId5" cstate="email">
+            <a:extLst>
+              <a:ext uri="{28A0092B-C50C-407E-A947-70E740481C1C}">
+                <a14:useLocalDpi xmlns:a14="http://schemas.microsoft.com/office/drawing/2010/main"/>
+              </a:ext>
+            </a:extLst>
+          </a:blip>
+          <a:srcRect/>
+          <a:stretch/>
+        </p:blipFill>
+        <p:spPr bwMode="auto">
+          <a:xfrm>
+            <a:off x="2793999" y="4160461"/>
+            <a:ext cx="1842059" cy="2277069"/>
+          </a:xfrm>
+          <a:prstGeom prst="rect">
+            <a:avLst/>
+          </a:prstGeom>
+          <a:noFill/>
+          <a:extLst>
+            <a:ext uri="{909E8E84-426E-40DD-AFC4-6F175D3DCCD1}">
+              <a14:hiddenFill xmlns:a14="http://schemas.microsoft.com/office/drawing/2010/main">
+                <a:solidFill>
+                  <a:srgbClr val="FFFFFF"/>
+                </a:solidFill>
+              </a14:hiddenFill>
+            </a:ext>
+          </a:extLst>
+        </p:spPr>
+      </p:pic>
+      <p:sp>
+        <p:nvSpPr>
+          <p:cNvPr id="9" name="TextBox 8">
+            <a:extLst>
+              <a:ext uri="{FF2B5EF4-FFF2-40B4-BE49-F238E27FC236}">
+                <a16:creationId xmlns:a16="http://schemas.microsoft.com/office/drawing/2014/main" id="{5FE68235-DA87-9642-AF27-C4835BC23BB7}"/>
+              </a:ext>
+            </a:extLst>
+          </p:cNvPr>
+          <p:cNvSpPr txBox="1"/>
+          <p:nvPr/>
+        </p:nvSpPr>
+        <p:spPr>
+          <a:xfrm>
+            <a:off x="8191503" y="118753"/>
+            <a:ext cx="3857995" cy="523220"/>
+          </a:xfrm>
+          <a:prstGeom prst="rect">
+            <a:avLst/>
+          </a:prstGeom>
+          <a:noFill/>
         </p:spPr>
         <p:txBody>
           <a:bodyPr wrap="square" rtlCol="0">
@@ -3836,216 +3937,291 @@
           <a:lstStyle/>
           <a:p>
             <a:r>
+              <a:rPr lang="en-US" sz="2800" b="1" dirty="0" err="1"/>
+              <a:t>Inmon</a:t>
+            </a:r>
+            <a:r>
+              <a:rPr lang="en-US" sz="2800" b="1" dirty="0"/>
+              <a:t> DW Framework</a:t>
+            </a:r>
+          </a:p>
+        </p:txBody>
+      </p:sp>
+      <p:pic>
+        <p:nvPicPr>
+          <p:cNvPr id="10" name="Picture 6">
+            <a:extLst>
+              <a:ext uri="{FF2B5EF4-FFF2-40B4-BE49-F238E27FC236}">
+                <a16:creationId xmlns:a16="http://schemas.microsoft.com/office/drawing/2014/main" id="{12840A34-CCB8-574E-9DBC-EFB4880CEADB}"/>
+              </a:ext>
+            </a:extLst>
+          </p:cNvPr>
+          <p:cNvPicPr>
+            <a:picLocks noChangeAspect="1" noChangeArrowheads="1"/>
+          </p:cNvPicPr>
+          <p:nvPr/>
+        </p:nvPicPr>
+        <p:blipFill>
+          <a:blip r:embed="rId6" cstate="email">
+            <a:extLst>
+              <a:ext uri="{28A0092B-C50C-407E-A947-70E740481C1C}">
+                <a14:useLocalDpi xmlns:a14="http://schemas.microsoft.com/office/drawing/2010/main"/>
+              </a:ext>
+            </a:extLst>
+          </a:blip>
+          <a:srcRect/>
+          <a:stretch>
+            <a:fillRect/>
+          </a:stretch>
+        </p:blipFill>
+        <p:spPr bwMode="auto">
+          <a:xfrm>
+            <a:off x="9207500" y="852270"/>
+            <a:ext cx="1249610" cy="1816100"/>
+          </a:xfrm>
+          <a:prstGeom prst="rect">
+            <a:avLst/>
+          </a:prstGeom>
+          <a:noFill/>
+          <a:extLst>
+            <a:ext uri="{909E8E84-426E-40DD-AFC4-6F175D3DCCD1}">
+              <a14:hiddenFill xmlns:a14="http://schemas.microsoft.com/office/drawing/2010/main">
+                <a:solidFill>
+                  <a:srgbClr val="FFFFFF"/>
+                </a:solidFill>
+              </a14:hiddenFill>
+            </a:ext>
+          </a:extLst>
+        </p:spPr>
+      </p:pic>
+      <p:sp>
+        <p:nvSpPr>
+          <p:cNvPr id="11" name="TextBox 10">
+            <a:extLst>
+              <a:ext uri="{FF2B5EF4-FFF2-40B4-BE49-F238E27FC236}">
+                <a16:creationId xmlns:a16="http://schemas.microsoft.com/office/drawing/2014/main" id="{EE04A850-E9C3-DB4B-8CFD-9FC3A00FB0FB}"/>
+              </a:ext>
+            </a:extLst>
+          </p:cNvPr>
+          <p:cNvSpPr txBox="1"/>
+          <p:nvPr/>
+        </p:nvSpPr>
+        <p:spPr>
+          <a:xfrm>
+            <a:off x="8890000" y="2687467"/>
+            <a:ext cx="1905000" cy="584775"/>
+          </a:xfrm>
+          <a:prstGeom prst="rect">
+            <a:avLst/>
+          </a:prstGeom>
+          <a:noFill/>
+        </p:spPr>
+        <p:txBody>
+          <a:bodyPr wrap="square" rtlCol="0">
+            <a:spAutoFit/>
+          </a:bodyPr>
+          <a:lstStyle/>
+          <a:p>
+            <a:pPr algn="ctr"/>
+            <a:r>
               <a:rPr lang="en-US" sz="1600" dirty="0"/>
-              <a:t>Old way of doing things:</a:t>
-            </a:r>
-          </a:p>
-          <a:p>
-            <a:endParaRPr lang="en-US" sz="1600" b="1" dirty="0">
-              <a:solidFill>
-                <a:srgbClr val="0070C0"/>
-              </a:solidFill>
-            </a:endParaRPr>
-          </a:p>
-          <a:p>
-            <a:r>
-              <a:rPr lang="en-US" sz="2000" b="1" dirty="0">
-                <a:solidFill>
-                  <a:srgbClr val="0070C0"/>
-                </a:solidFill>
-              </a:rPr>
-              <a:t>Data</a:t>
-            </a:r>
-            <a:r>
-              <a:rPr lang="en-US" sz="2000" dirty="0"/>
-              <a:t>   </a:t>
-            </a:r>
-            <a:r>
-              <a:rPr lang="en-US" sz="2000" dirty="0">
-                <a:solidFill>
-                  <a:srgbClr val="FF0000"/>
-                </a:solidFill>
-              </a:rPr>
-              <a:t>=&gt;   ETL   =&gt;   Data </a:t>
-            </a:r>
-            <a:r>
-              <a:rPr lang="en-US" sz="2000" dirty="0" err="1">
-                <a:solidFill>
-                  <a:srgbClr val="FF0000"/>
-                </a:solidFill>
-              </a:rPr>
-              <a:t>WareHouse</a:t>
-            </a:r>
-            <a:r>
-              <a:rPr lang="en-US" sz="2000" dirty="0">
-                <a:solidFill>
-                  <a:srgbClr val="FF0000"/>
-                </a:solidFill>
-              </a:rPr>
-              <a:t>   =&gt;   ETL   =&gt;   OLAP Cube   =&gt;  </a:t>
-            </a:r>
-            <a:r>
-              <a:rPr lang="en-US" sz="2000" dirty="0"/>
-              <a:t> </a:t>
-            </a:r>
-            <a:r>
-              <a:rPr lang="en-US" sz="2000" b="1" dirty="0">
-                <a:solidFill>
-                  <a:srgbClr val="0070C0"/>
-                </a:solidFill>
-              </a:rPr>
-              <a:t>Reporting</a:t>
-            </a:r>
-          </a:p>
-          <a:p>
-            <a:endParaRPr lang="en-US" sz="1600" dirty="0"/>
-          </a:p>
-          <a:p>
-            <a:endParaRPr lang="en-US" sz="1600" dirty="0"/>
-          </a:p>
-          <a:p>
-            <a:r>
-              <a:rPr lang="en-US" sz="1600" dirty="0"/>
-              <a:t>The above "old way" Includes a lot of ETL, Data modeling &amp; Design:</a:t>
-            </a:r>
-          </a:p>
-          <a:p>
-            <a:pPr marL="285750" indent="-285750">
-              <a:buFont typeface="Arial" panose="020B0604020202020204" pitchFamily="34" charset="0"/>
-              <a:buChar char="•"/>
-            </a:pPr>
-            <a:r>
-              <a:rPr lang="en-US" sz="1600" b="1" dirty="0">
-                <a:solidFill>
-                  <a:srgbClr val="FF0000"/>
-                </a:solidFill>
-              </a:rPr>
-              <a:t>Kimball Framework</a:t>
-            </a:r>
-          </a:p>
-          <a:p>
-            <a:pPr marL="285750" indent="-285750">
-              <a:buFont typeface="Arial" panose="020B0604020202020204" pitchFamily="34" charset="0"/>
-              <a:buChar char="•"/>
-            </a:pPr>
-            <a:r>
-              <a:rPr lang="en-US" sz="1600" b="1" dirty="0" err="1">
-                <a:solidFill>
-                  <a:srgbClr val="FF0000"/>
-                </a:solidFill>
-              </a:rPr>
-              <a:t>Inmon</a:t>
-            </a:r>
-            <a:r>
-              <a:rPr lang="en-US" sz="1600" b="1" dirty="0">
-                <a:solidFill>
-                  <a:srgbClr val="FF0000"/>
-                </a:solidFill>
-              </a:rPr>
-              <a:t> Framework</a:t>
-            </a:r>
-          </a:p>
-          <a:p>
-            <a:pPr marL="285750" indent="-285750">
-              <a:buFont typeface="Arial" panose="020B0604020202020204" pitchFamily="34" charset="0"/>
-              <a:buChar char="•"/>
-            </a:pPr>
-            <a:r>
-              <a:rPr lang="en-US" sz="1600" dirty="0"/>
-              <a:t>Data Vault by Dan </a:t>
-            </a:r>
-            <a:r>
-              <a:rPr lang="en-US" sz="1600" dirty="0" err="1"/>
-              <a:t>Linstedt</a:t>
-            </a:r>
-            <a:r>
-              <a:rPr lang="en-US" sz="1600" dirty="0"/>
-              <a:t> (combines Kimball &amp; </a:t>
+              <a:t>William H. </a:t>
             </a:r>
             <a:r>
               <a:rPr lang="en-US" sz="1600" dirty="0" err="1"/>
               <a:t>Inmon</a:t>
             </a:r>
+            <a:endParaRPr lang="en-US" sz="1600" dirty="0"/>
+          </a:p>
+          <a:p>
+            <a:pPr algn="ctr"/>
             <a:r>
               <a:rPr lang="en-US" sz="1600" dirty="0"/>
-              <a:t>).</a:t>
-            </a:r>
-          </a:p>
-          <a:p>
-            <a:endParaRPr lang="en-US" sz="1600" dirty="0"/>
-          </a:p>
-          <a:p>
+              <a:t>(1945 – present)</a:t>
+            </a:r>
+          </a:p>
+        </p:txBody>
+      </p:sp>
+      <p:pic>
+        <p:nvPicPr>
+          <p:cNvPr id="12" name="Picture 2">
+            <a:extLst>
+              <a:ext uri="{FF2B5EF4-FFF2-40B4-BE49-F238E27FC236}">
+                <a16:creationId xmlns:a16="http://schemas.microsoft.com/office/drawing/2014/main" id="{415DA38A-988E-0D40-BBF8-D685231221F0}"/>
+              </a:ext>
+            </a:extLst>
+          </p:cNvPr>
+          <p:cNvPicPr>
+            <a:picLocks noChangeAspect="1" noChangeArrowheads="1"/>
+          </p:cNvPicPr>
+          <p:nvPr/>
+        </p:nvPicPr>
+        <p:blipFill>
+          <a:blip r:embed="rId7" cstate="email">
+            <a:extLst>
+              <a:ext uri="{28A0092B-C50C-407E-A947-70E740481C1C}">
+                <a14:useLocalDpi xmlns:a14="http://schemas.microsoft.com/office/drawing/2010/main"/>
+              </a:ext>
+            </a:extLst>
+          </a:blip>
+          <a:srcRect/>
+          <a:stretch>
+            <a:fillRect/>
+          </a:stretch>
+        </p:blipFill>
+        <p:spPr bwMode="auto">
+          <a:xfrm>
+            <a:off x="7964060" y="4160461"/>
+            <a:ext cx="1848980" cy="2277069"/>
+          </a:xfrm>
+          <a:prstGeom prst="rect">
+            <a:avLst/>
+          </a:prstGeom>
+          <a:noFill/>
+          <a:extLst>
+            <a:ext uri="{909E8E84-426E-40DD-AFC4-6F175D3DCCD1}">
+              <a14:hiddenFill xmlns:a14="http://schemas.microsoft.com/office/drawing/2010/main">
+                <a:solidFill>
+                  <a:srgbClr val="FFFFFF"/>
+                </a:solidFill>
+              </a14:hiddenFill>
+            </a:ext>
+          </a:extLst>
+        </p:spPr>
+      </p:pic>
+      <p:pic>
+        <p:nvPicPr>
+          <p:cNvPr id="13" name="Picture 4">
+            <a:extLst>
+              <a:ext uri="{FF2B5EF4-FFF2-40B4-BE49-F238E27FC236}">
+                <a16:creationId xmlns:a16="http://schemas.microsoft.com/office/drawing/2014/main" id="{DA81332F-2F81-5B45-954D-22A2A17F45E3}"/>
+              </a:ext>
+            </a:extLst>
+          </p:cNvPr>
+          <p:cNvPicPr>
+            <a:picLocks noChangeAspect="1" noChangeArrowheads="1"/>
+          </p:cNvPicPr>
+          <p:nvPr/>
+        </p:nvPicPr>
+        <p:blipFill>
+          <a:blip r:embed="rId8" cstate="email">
+            <a:extLst>
+              <a:ext uri="{28A0092B-C50C-407E-A947-70E740481C1C}">
+                <a14:useLocalDpi xmlns:a14="http://schemas.microsoft.com/office/drawing/2010/main"/>
+              </a:ext>
+            </a:extLst>
+          </a:blip>
+          <a:srcRect/>
+          <a:stretch>
+            <a:fillRect/>
+          </a:stretch>
+        </p:blipFill>
+        <p:spPr bwMode="auto">
+          <a:xfrm>
+            <a:off x="10169432" y="4160461"/>
+            <a:ext cx="1743167" cy="2277069"/>
+          </a:xfrm>
+          <a:prstGeom prst="rect">
+            <a:avLst/>
+          </a:prstGeom>
+          <a:noFill/>
+          <a:extLst>
+            <a:ext uri="{909E8E84-426E-40DD-AFC4-6F175D3DCCD1}">
+              <a14:hiddenFill xmlns:a14="http://schemas.microsoft.com/office/drawing/2010/main">
+                <a:solidFill>
+                  <a:srgbClr val="FFFFFF"/>
+                </a:solidFill>
+              </a14:hiddenFill>
+            </a:ext>
+          </a:extLst>
+        </p:spPr>
+      </p:pic>
+      <p:pic>
+        <p:nvPicPr>
+          <p:cNvPr id="1036" name="Picture 12" descr="Ralph Kimball data warehouse architecture">
+            <a:extLst>
+              <a:ext uri="{FF2B5EF4-FFF2-40B4-BE49-F238E27FC236}">
+                <a16:creationId xmlns:a16="http://schemas.microsoft.com/office/drawing/2014/main" id="{4B49ABE2-7BEF-644F-91D4-C8C012C6F9F9}"/>
+              </a:ext>
+            </a:extLst>
+          </p:cNvPr>
+          <p:cNvPicPr>
+            <a:picLocks noChangeAspect="1" noChangeArrowheads="1"/>
+          </p:cNvPicPr>
+          <p:nvPr/>
+        </p:nvPicPr>
+        <p:blipFill>
+          <a:blip r:embed="rId9">
+            <a:extLst>
+              <a:ext uri="{28A0092B-C50C-407E-A947-70E740481C1C}">
+                <a14:useLocalDpi xmlns:a14="http://schemas.microsoft.com/office/drawing/2010/main"/>
+              </a:ext>
+            </a:extLst>
+          </a:blip>
+          <a:srcRect/>
+          <a:stretch>
+            <a:fillRect/>
+          </a:stretch>
+        </p:blipFill>
+        <p:spPr bwMode="auto">
+          <a:xfrm>
+            <a:off x="142504" y="781336"/>
+            <a:ext cx="1592386" cy="2070102"/>
+          </a:xfrm>
+          <a:prstGeom prst="rect">
+            <a:avLst/>
+          </a:prstGeom>
+          <a:noFill/>
+          <a:extLst>
+            <a:ext uri="{909E8E84-426E-40DD-AFC4-6F175D3DCCD1}">
+              <a14:hiddenFill xmlns:a14="http://schemas.microsoft.com/office/drawing/2010/main">
+                <a:solidFill>
+                  <a:srgbClr val="FFFFFF"/>
+                </a:solidFill>
+              </a14:hiddenFill>
+            </a:ext>
+          </a:extLst>
+        </p:spPr>
+      </p:pic>
+      <p:sp>
+        <p:nvSpPr>
+          <p:cNvPr id="15" name="TextBox 14">
+            <a:extLst>
+              <a:ext uri="{FF2B5EF4-FFF2-40B4-BE49-F238E27FC236}">
+                <a16:creationId xmlns:a16="http://schemas.microsoft.com/office/drawing/2014/main" id="{EC47885C-34DB-5E4D-BE91-505AFE558C65}"/>
+              </a:ext>
+            </a:extLst>
+          </p:cNvPr>
+          <p:cNvSpPr txBox="1"/>
+          <p:nvPr/>
+        </p:nvSpPr>
+        <p:spPr>
+          <a:xfrm>
+            <a:off x="34040" y="2851438"/>
+            <a:ext cx="1807053" cy="584775"/>
+          </a:xfrm>
+          <a:prstGeom prst="rect">
+            <a:avLst/>
+          </a:prstGeom>
+          <a:noFill/>
+        </p:spPr>
+        <p:txBody>
+          <a:bodyPr wrap="square" rtlCol="0">
+            <a:spAutoFit/>
+          </a:bodyPr>
+          <a:lstStyle/>
+          <a:p>
+            <a:pPr algn="ctr"/>
             <a:r>
               <a:rPr lang="en-US" sz="1600" dirty="0"/>
-              <a:t>But imagine that memory and compute power have become so cheap</a:t>
-            </a:r>
-          </a:p>
-          <a:p>
+              <a:t>Ralph Kimball</a:t>
+            </a:r>
+          </a:p>
+          <a:p>
+            <a:pPr algn="ctr"/>
             <a:r>
               <a:rPr lang="en-US" sz="1600" dirty="0"/>
-              <a:t>that your regular SQL database can run any queries very fast </a:t>
-            </a:r>
-          </a:p>
-          <a:p>
-            <a:r>
-              <a:rPr lang="en-US" sz="1600" dirty="0"/>
-              <a:t>using in-memory columnar storage </a:t>
-            </a:r>
-          </a:p>
-          <a:p>
-            <a:r>
-              <a:rPr lang="en-US" sz="1600" dirty="0"/>
-              <a:t>and </a:t>
-            </a:r>
-            <a:r>
-              <a:rPr lang="en-US" sz="1600" b="1" dirty="0">
-                <a:solidFill>
-                  <a:srgbClr val="FF0000"/>
-                </a:solidFill>
-              </a:rPr>
-              <a:t>MPP</a:t>
-            </a:r>
-            <a:r>
-              <a:rPr lang="en-US" sz="1600" dirty="0"/>
-              <a:t> = Massive Parallel Processing.</a:t>
-            </a:r>
-          </a:p>
-          <a:p>
-            <a:endParaRPr lang="en-US" sz="1600" dirty="0"/>
-          </a:p>
-          <a:p>
-            <a:r>
-              <a:rPr lang="en-US" sz="1600" dirty="0"/>
-              <a:t>Then you don't need to hire data modelers.</a:t>
-            </a:r>
-          </a:p>
-          <a:p>
-            <a:r>
-              <a:rPr lang="en-US" sz="1600" dirty="0"/>
-              <a:t>You don't need all the OLAP infrastructure.</a:t>
-            </a:r>
-          </a:p>
-          <a:p>
-            <a:r>
-              <a:rPr lang="en-US" sz="1600" dirty="0"/>
-              <a:t>You can simply query your data as it is.</a:t>
-            </a:r>
-          </a:p>
-          <a:p>
-            <a:endParaRPr lang="en-US" sz="1600" b="1" dirty="0">
-              <a:solidFill>
-                <a:srgbClr val="0070C0"/>
-              </a:solidFill>
-            </a:endParaRPr>
-          </a:p>
-          <a:p>
-            <a:r>
-              <a:rPr lang="en-US" sz="1600" b="1" dirty="0">
-                <a:solidFill>
-                  <a:srgbClr val="0070C0"/>
-                </a:solidFill>
-              </a:rPr>
-              <a:t>          Data =&gt; Reporting</a:t>
+              <a:t>(1944 – present)</a:t>
             </a:r>
           </a:p>
         </p:txBody>
@@ -4053,7 +4229,264 @@
     </p:spTree>
     <p:extLst>
       <p:ext uri="{BB962C8B-B14F-4D97-AF65-F5344CB8AC3E}">
-        <p14:creationId xmlns:p14="http://schemas.microsoft.com/office/powerpoint/2010/main" val="410025639"/>
+        <p14:creationId xmlns:p14="http://schemas.microsoft.com/office/powerpoint/2010/main" val="4190198152"/>
+      </p:ext>
+    </p:extLst>
+  </p:cSld>
+  <p:clrMapOvr>
+    <a:masterClrMapping/>
+  </p:clrMapOvr>
+</p:sld>
+</file>
+
+<file path=ppt/slides/slide10.xml><?xml version="1.0" encoding="utf-8"?>
+<p:sld xmlns:a="http://schemas.openxmlformats.org/drawingml/2006/main" xmlns:r="http://schemas.openxmlformats.org/officeDocument/2006/relationships" xmlns:p="http://schemas.openxmlformats.org/presentationml/2006/main">
+  <p:cSld>
+    <p:spTree>
+      <p:nvGrpSpPr>
+        <p:cNvPr id="1" name=""/>
+        <p:cNvGrpSpPr/>
+        <p:nvPr/>
+      </p:nvGrpSpPr>
+      <p:grpSpPr>
+        <a:xfrm>
+          <a:off x="0" y="0"/>
+          <a:ext cx="0" cy="0"/>
+          <a:chOff x="0" y="0"/>
+          <a:chExt cx="0" cy="0"/>
+        </a:xfrm>
+      </p:grpSpPr>
+      <p:sp>
+        <p:nvSpPr>
+          <p:cNvPr id="2" name="TextBox 1">
+            <a:extLst>
+              <a:ext uri="{FF2B5EF4-FFF2-40B4-BE49-F238E27FC236}">
+                <a16:creationId xmlns:a16="http://schemas.microsoft.com/office/drawing/2014/main" id="{2B91F5F7-146D-574B-ACB0-83F0C70FE549}"/>
+              </a:ext>
+            </a:extLst>
+          </p:cNvPr>
+          <p:cNvSpPr txBox="1"/>
+          <p:nvPr/>
+        </p:nvSpPr>
+        <p:spPr>
+          <a:xfrm>
+            <a:off x="142504" y="118753"/>
+            <a:ext cx="2778826" cy="523220"/>
+          </a:xfrm>
+          <a:prstGeom prst="rect">
+            <a:avLst/>
+          </a:prstGeom>
+          <a:noFill/>
+        </p:spPr>
+        <p:txBody>
+          <a:bodyPr wrap="square" rtlCol="0">
+            <a:spAutoFit/>
+          </a:bodyPr>
+          <a:lstStyle/>
+          <a:p>
+            <a:r>
+              <a:rPr lang="en-US" sz="2800" b="1" dirty="0">
+                <a:solidFill>
+                  <a:srgbClr val="00B050"/>
+                </a:solidFill>
+              </a:rPr>
+              <a:t>History - Unix</a:t>
+            </a:r>
+          </a:p>
+        </p:txBody>
+      </p:sp>
+      <p:pic>
+        <p:nvPicPr>
+          <p:cNvPr id="1028" name="Picture 4">
+            <a:extLst>
+              <a:ext uri="{FF2B5EF4-FFF2-40B4-BE49-F238E27FC236}">
+                <a16:creationId xmlns:a16="http://schemas.microsoft.com/office/drawing/2014/main" id="{78FAF3C8-1776-EE44-8C5C-DCB0F4D25CC7}"/>
+              </a:ext>
+            </a:extLst>
+          </p:cNvPr>
+          <p:cNvPicPr>
+            <a:picLocks noChangeAspect="1" noChangeArrowheads="1"/>
+          </p:cNvPicPr>
+          <p:nvPr/>
+        </p:nvPicPr>
+        <p:blipFill>
+          <a:blip r:embed="rId2" cstate="email">
+            <a:extLst>
+              <a:ext uri="{28A0092B-C50C-407E-A947-70E740481C1C}">
+                <a14:useLocalDpi xmlns:a14="http://schemas.microsoft.com/office/drawing/2010/main"/>
+              </a:ext>
+            </a:extLst>
+          </a:blip>
+          <a:srcRect/>
+          <a:stretch>
+            <a:fillRect/>
+          </a:stretch>
+        </p:blipFill>
+        <p:spPr bwMode="auto">
+          <a:xfrm>
+            <a:off x="5219536" y="1068037"/>
+            <a:ext cx="4140200" cy="3314700"/>
+          </a:xfrm>
+          <a:prstGeom prst="rect">
+            <a:avLst/>
+          </a:prstGeom>
+          <a:noFill/>
+          <a:extLst>
+            <a:ext uri="{909E8E84-426E-40DD-AFC4-6F175D3DCCD1}">
+              <a14:hiddenFill xmlns:a14="http://schemas.microsoft.com/office/drawing/2010/main">
+                <a:solidFill>
+                  <a:srgbClr val="FFFFFF"/>
+                </a:solidFill>
+              </a14:hiddenFill>
+            </a:ext>
+          </a:extLst>
+        </p:spPr>
+      </p:pic>
+      <p:sp>
+        <p:nvSpPr>
+          <p:cNvPr id="3" name="TextBox 2">
+            <a:extLst>
+              <a:ext uri="{FF2B5EF4-FFF2-40B4-BE49-F238E27FC236}">
+                <a16:creationId xmlns:a16="http://schemas.microsoft.com/office/drawing/2014/main" id="{BA4C09F8-8AA8-6A4F-B793-A40EA71DD0E4}"/>
+              </a:ext>
+            </a:extLst>
+          </p:cNvPr>
+          <p:cNvSpPr txBox="1"/>
+          <p:nvPr/>
+        </p:nvSpPr>
+        <p:spPr>
+          <a:xfrm>
+            <a:off x="5211166" y="4418362"/>
+            <a:ext cx="5179743" cy="707886"/>
+          </a:xfrm>
+          <a:prstGeom prst="rect">
+            <a:avLst/>
+          </a:prstGeom>
+          <a:noFill/>
+        </p:spPr>
+        <p:txBody>
+          <a:bodyPr wrap="square" rtlCol="0">
+            <a:spAutoFit/>
+          </a:bodyPr>
+          <a:lstStyle/>
+          <a:p>
+            <a:r>
+              <a:rPr lang="en-US" sz="1400" dirty="0"/>
+              <a:t>Ken Thompson (seated) and Dennis Ritchie (standing) </a:t>
+            </a:r>
+          </a:p>
+          <a:p>
+            <a:r>
+              <a:rPr lang="en-US" sz="1400" dirty="0"/>
+              <a:t>at a PDP-11 in 1972.</a:t>
+            </a:r>
+          </a:p>
+          <a:p>
+            <a:r>
+              <a:rPr lang="en-US" sz="1200" dirty="0">
+                <a:hlinkClick r:id="rId3"/>
+              </a:rPr>
+              <a:t>https://homepage.cs.uri.edu/~thenry/resources/unix_art/ch02s01.html</a:t>
+            </a:r>
+            <a:r>
+              <a:rPr lang="en-US" sz="1200" dirty="0"/>
+              <a:t> </a:t>
+            </a:r>
+          </a:p>
+        </p:txBody>
+      </p:sp>
+      <p:pic>
+        <p:nvPicPr>
+          <p:cNvPr id="1030" name="Picture 6" descr="The PDP-7.">
+            <a:extLst>
+              <a:ext uri="{FF2B5EF4-FFF2-40B4-BE49-F238E27FC236}">
+                <a16:creationId xmlns:a16="http://schemas.microsoft.com/office/drawing/2014/main" id="{5741A8A5-199A-794A-834E-BB94F49FF0B5}"/>
+              </a:ext>
+            </a:extLst>
+          </p:cNvPr>
+          <p:cNvPicPr>
+            <a:picLocks noChangeAspect="1" noChangeArrowheads="1"/>
+          </p:cNvPicPr>
+          <p:nvPr/>
+        </p:nvPicPr>
+        <p:blipFill>
+          <a:blip r:embed="rId4" cstate="email">
+            <a:extLst>
+              <a:ext uri="{28A0092B-C50C-407E-A947-70E740481C1C}">
+                <a14:useLocalDpi xmlns:a14="http://schemas.microsoft.com/office/drawing/2010/main"/>
+              </a:ext>
+            </a:extLst>
+          </a:blip>
+          <a:srcRect/>
+          <a:stretch>
+            <a:fillRect/>
+          </a:stretch>
+        </p:blipFill>
+        <p:spPr bwMode="auto">
+          <a:xfrm>
+            <a:off x="529978" y="1068037"/>
+            <a:ext cx="3543257" cy="4349778"/>
+          </a:xfrm>
+          <a:prstGeom prst="rect">
+            <a:avLst/>
+          </a:prstGeom>
+          <a:noFill/>
+          <a:extLst>
+            <a:ext uri="{909E8E84-426E-40DD-AFC4-6F175D3DCCD1}">
+              <a14:hiddenFill xmlns:a14="http://schemas.microsoft.com/office/drawing/2010/main">
+                <a:solidFill>
+                  <a:srgbClr val="FFFFFF"/>
+                </a:solidFill>
+              </a14:hiddenFill>
+            </a:ext>
+          </a:extLst>
+        </p:spPr>
+      </p:pic>
+      <p:sp>
+        <p:nvSpPr>
+          <p:cNvPr id="8" name="TextBox 7">
+            <a:extLst>
+              <a:ext uri="{FF2B5EF4-FFF2-40B4-BE49-F238E27FC236}">
+                <a16:creationId xmlns:a16="http://schemas.microsoft.com/office/drawing/2014/main" id="{3B7D39AD-491E-9C47-9C8D-470771084901}"/>
+              </a:ext>
+            </a:extLst>
+          </p:cNvPr>
+          <p:cNvSpPr txBox="1"/>
+          <p:nvPr/>
+        </p:nvSpPr>
+        <p:spPr>
+          <a:xfrm>
+            <a:off x="529978" y="5572195"/>
+            <a:ext cx="3543257" cy="738664"/>
+          </a:xfrm>
+          <a:prstGeom prst="rect">
+            <a:avLst/>
+          </a:prstGeom>
+          <a:noFill/>
+        </p:spPr>
+        <p:txBody>
+          <a:bodyPr wrap="square" rtlCol="0">
+            <a:spAutoFit/>
+          </a:bodyPr>
+          <a:lstStyle/>
+          <a:p>
+            <a:r>
+              <a:rPr lang="en-US" sz="1400" dirty="0"/>
+              <a:t>PDP-7 minicomputer (1969) on which Ken Thompson created the Space Travel game </a:t>
+            </a:r>
+          </a:p>
+          <a:p>
+            <a:r>
+              <a:rPr lang="en-US" sz="1400" dirty="0"/>
+              <a:t>and Unix OS</a:t>
+            </a:r>
+          </a:p>
+        </p:txBody>
+      </p:sp>
+    </p:spTree>
+    <p:extLst>
+      <p:ext uri="{BB962C8B-B14F-4D97-AF65-F5344CB8AC3E}">
+        <p14:creationId xmlns:p14="http://schemas.microsoft.com/office/powerpoint/2010/main" val="172540453"/>
       </p:ext>
     </p:extLst>
   </p:cSld>
@@ -4614,6 +5047,354 @@
 </file>
 
 <file path=ppt/slides/slide3.xml><?xml version="1.0" encoding="utf-8"?>
+<p:sld xmlns:a="http://schemas.openxmlformats.org/drawingml/2006/main" xmlns:r="http://schemas.openxmlformats.org/officeDocument/2006/relationships" xmlns:p="http://schemas.openxmlformats.org/presentationml/2006/main">
+  <p:cSld>
+    <p:spTree>
+      <p:nvGrpSpPr>
+        <p:cNvPr id="1" name=""/>
+        <p:cNvGrpSpPr/>
+        <p:nvPr/>
+      </p:nvGrpSpPr>
+      <p:grpSpPr>
+        <a:xfrm>
+          <a:off x="0" y="0"/>
+          <a:ext cx="0" cy="0"/>
+          <a:chOff x="0" y="0"/>
+          <a:chExt cx="0" cy="0"/>
+        </a:xfrm>
+      </p:grpSpPr>
+      <p:pic>
+        <p:nvPicPr>
+          <p:cNvPr id="2" name="Picture 1">
+            <a:extLst>
+              <a:ext uri="{FF2B5EF4-FFF2-40B4-BE49-F238E27FC236}">
+                <a16:creationId xmlns:a16="http://schemas.microsoft.com/office/drawing/2014/main" id="{F4626B5A-FFA5-2E46-962E-FE8D97840C15}"/>
+              </a:ext>
+            </a:extLst>
+          </p:cNvPr>
+          <p:cNvPicPr>
+            <a:picLocks noChangeAspect="1"/>
+          </p:cNvPicPr>
+          <p:nvPr/>
+        </p:nvPicPr>
+        <p:blipFill>
+          <a:blip r:embed="rId2" cstate="email">
+            <a:extLst>
+              <a:ext uri="{28A0092B-C50C-407E-A947-70E740481C1C}">
+                <a14:useLocalDpi xmlns:a14="http://schemas.microsoft.com/office/drawing/2010/main"/>
+              </a:ext>
+            </a:extLst>
+          </a:blip>
+          <a:stretch>
+            <a:fillRect/>
+          </a:stretch>
+        </p:blipFill>
+        <p:spPr>
+          <a:xfrm>
+            <a:off x="6096000" y="469900"/>
+            <a:ext cx="5005169" cy="5918200"/>
+          </a:xfrm>
+          <a:prstGeom prst="rect">
+            <a:avLst/>
+          </a:prstGeom>
+        </p:spPr>
+      </p:pic>
+      <p:sp>
+        <p:nvSpPr>
+          <p:cNvPr id="3" name="TextBox 2">
+            <a:extLst>
+              <a:ext uri="{FF2B5EF4-FFF2-40B4-BE49-F238E27FC236}">
+                <a16:creationId xmlns:a16="http://schemas.microsoft.com/office/drawing/2014/main" id="{5A9966EE-FAC1-274E-90CA-F50154FF7E2C}"/>
+              </a:ext>
+            </a:extLst>
+          </p:cNvPr>
+          <p:cNvSpPr txBox="1"/>
+          <p:nvPr/>
+        </p:nvSpPr>
+        <p:spPr>
+          <a:xfrm>
+            <a:off x="83127" y="1622688"/>
+            <a:ext cx="5652655" cy="4031873"/>
+          </a:xfrm>
+          <a:prstGeom prst="rect">
+            <a:avLst/>
+          </a:prstGeom>
+          <a:noFill/>
+        </p:spPr>
+        <p:txBody>
+          <a:bodyPr wrap="square" rtlCol="0">
+            <a:spAutoFit/>
+          </a:bodyPr>
+          <a:lstStyle/>
+          <a:p>
+            <a:r>
+              <a:rPr lang="en-US" sz="1600" dirty="0"/>
+              <a:t>Ralph Kimball’s paradigm: </a:t>
+            </a:r>
+          </a:p>
+          <a:p>
+            <a:endParaRPr lang="en-US" sz="1600" dirty="0"/>
+          </a:p>
+          <a:p>
+            <a:pPr marL="285750" indent="-285750">
+              <a:buFont typeface="Arial" panose="020B0604020202020204" pitchFamily="34" charset="0"/>
+              <a:buChar char="•"/>
+            </a:pPr>
+            <a:r>
+              <a:rPr lang="en-US" sz="1600" dirty="0"/>
+              <a:t>Each department in a company has its own </a:t>
+            </a:r>
+            <a:r>
+              <a:rPr lang="en-US" sz="1600" b="1" dirty="0">
+                <a:solidFill>
+                  <a:srgbClr val="FF0000"/>
+                </a:solidFill>
+              </a:rPr>
+              <a:t>Data Mart (DM)</a:t>
+            </a:r>
+            <a:r>
+              <a:rPr lang="en-US" sz="1600" dirty="0"/>
+              <a:t>. The company's </a:t>
+            </a:r>
+            <a:r>
+              <a:rPr lang="en-US" sz="1600" b="1" dirty="0"/>
+              <a:t>DW (Data Warehouse)</a:t>
+            </a:r>
+            <a:r>
+              <a:rPr lang="en-US" sz="1600" dirty="0"/>
+              <a:t> is the conglomerate of all </a:t>
+            </a:r>
+            <a:r>
+              <a:rPr lang="en-US" sz="1600" b="1" dirty="0">
+                <a:solidFill>
+                  <a:srgbClr val="FF0000"/>
+                </a:solidFill>
+              </a:rPr>
+              <a:t>DMs</a:t>
+            </a:r>
+            <a:r>
+              <a:rPr lang="en-US" sz="1600" dirty="0"/>
+              <a:t>.</a:t>
+            </a:r>
+          </a:p>
+          <a:p>
+            <a:pPr marL="285750" indent="-285750">
+              <a:buFont typeface="Arial" panose="020B0604020202020204" pitchFamily="34" charset="0"/>
+              <a:buChar char="•"/>
+            </a:pPr>
+            <a:r>
+              <a:rPr lang="en-US" sz="1600" dirty="0"/>
+              <a:t>Information is always stored in the </a:t>
+            </a:r>
+            <a:r>
+              <a:rPr lang="en-US" sz="1600" b="1" dirty="0">
+                <a:solidFill>
+                  <a:srgbClr val="00B050"/>
+                </a:solidFill>
+              </a:rPr>
+              <a:t>dimensional model</a:t>
+            </a:r>
+            <a:r>
+              <a:rPr lang="en-US" sz="1600" dirty="0"/>
+              <a:t>.</a:t>
+            </a:r>
+          </a:p>
+          <a:p>
+            <a:endParaRPr lang="en-US" sz="1600" dirty="0"/>
+          </a:p>
+          <a:p>
+            <a:endParaRPr lang="en-US" sz="1600" dirty="0"/>
+          </a:p>
+          <a:p>
+            <a:endParaRPr lang="en-US" sz="1600" dirty="0"/>
+          </a:p>
+          <a:p>
+            <a:endParaRPr lang="en-US" sz="1600" dirty="0"/>
+          </a:p>
+          <a:p>
+            <a:r>
+              <a:rPr lang="en-US" sz="1600" dirty="0"/>
+              <a:t>Bill </a:t>
+            </a:r>
+            <a:r>
+              <a:rPr lang="en-US" sz="1600" dirty="0" err="1"/>
+              <a:t>Inmon’s</a:t>
+            </a:r>
+            <a:r>
+              <a:rPr lang="en-US" sz="1600" dirty="0"/>
+              <a:t> paradigm: </a:t>
+            </a:r>
+          </a:p>
+          <a:p>
+            <a:endParaRPr lang="en-US" sz="1600" dirty="0"/>
+          </a:p>
+          <a:p>
+            <a:pPr marL="285750" indent="-285750">
+              <a:buFont typeface="Arial" panose="020B0604020202020204" pitchFamily="34" charset="0"/>
+              <a:buChar char="•"/>
+            </a:pPr>
+            <a:r>
+              <a:rPr lang="en-US" sz="1600" dirty="0"/>
+              <a:t>A company has </a:t>
+            </a:r>
+            <a:r>
+              <a:rPr lang="en-US" sz="1600" b="1" dirty="0">
+                <a:solidFill>
+                  <a:srgbClr val="FF0000"/>
+                </a:solidFill>
+              </a:rPr>
+              <a:t>one central DW</a:t>
+            </a:r>
+            <a:r>
+              <a:rPr lang="en-US" sz="1600" dirty="0"/>
+              <a:t> (Data </a:t>
+            </a:r>
+            <a:r>
+              <a:rPr lang="en-US" sz="1600" dirty="0" err="1"/>
+              <a:t>Warehous</a:t>
+            </a:r>
+            <a:r>
+              <a:rPr lang="en-US" sz="1600" dirty="0"/>
+              <a:t>). </a:t>
+            </a:r>
+            <a:br>
+              <a:rPr lang="en-US" sz="1600" dirty="0"/>
+            </a:br>
+            <a:r>
+              <a:rPr lang="en-US" sz="1600" dirty="0"/>
+              <a:t>Data Marts (</a:t>
+            </a:r>
+            <a:r>
+              <a:rPr lang="en-US" sz="1600" b="1" dirty="0">
+                <a:solidFill>
+                  <a:srgbClr val="FF0000"/>
+                </a:solidFill>
+              </a:rPr>
+              <a:t>DMs</a:t>
+            </a:r>
+            <a:r>
+              <a:rPr lang="en-US" sz="1600" dirty="0"/>
+              <a:t>) source their data from the </a:t>
+            </a:r>
+            <a:r>
+              <a:rPr lang="en-US" sz="1600" b="1" dirty="0">
+                <a:solidFill>
+                  <a:srgbClr val="FF0000"/>
+                </a:solidFill>
+              </a:rPr>
+              <a:t>DW</a:t>
+            </a:r>
+            <a:r>
+              <a:rPr lang="en-US" sz="1600" dirty="0"/>
+              <a:t>.  </a:t>
+            </a:r>
+          </a:p>
+          <a:p>
+            <a:pPr marL="285750" indent="-285750">
+              <a:buFont typeface="Arial" panose="020B0604020202020204" pitchFamily="34" charset="0"/>
+              <a:buChar char="•"/>
+            </a:pPr>
+            <a:r>
+              <a:rPr lang="en-US" sz="1600" dirty="0"/>
+              <a:t>In the </a:t>
+            </a:r>
+            <a:r>
+              <a:rPr lang="en-US" sz="1600" b="1" dirty="0">
+                <a:solidFill>
+                  <a:srgbClr val="FF0000"/>
+                </a:solidFill>
+              </a:rPr>
+              <a:t>DW</a:t>
+            </a:r>
+            <a:r>
+              <a:rPr lang="en-US" sz="1600" dirty="0"/>
+              <a:t>, information is stored in </a:t>
+            </a:r>
+            <a:r>
+              <a:rPr lang="en-US" sz="1600" b="1" dirty="0">
+                <a:solidFill>
+                  <a:srgbClr val="00B050"/>
+                </a:solidFill>
+              </a:rPr>
+              <a:t>3rd normal form</a:t>
+            </a:r>
+            <a:r>
+              <a:rPr lang="en-US" sz="1600" dirty="0"/>
+              <a:t>.</a:t>
+            </a:r>
+            <a:br>
+              <a:rPr lang="en-US" sz="1600" dirty="0"/>
+            </a:br>
+            <a:r>
+              <a:rPr lang="en-US" sz="1600" dirty="0"/>
+              <a:t>( </a:t>
+            </a:r>
+            <a:r>
+              <a:rPr lang="en-US" sz="1600" dirty="0">
+                <a:hlinkClick r:id="rId3"/>
+              </a:rPr>
+              <a:t>https://en.wikipedia.org/wiki/Third_normal_form</a:t>
+            </a:r>
+            <a:r>
+              <a:rPr lang="en-US" sz="1600" dirty="0"/>
+              <a:t> )</a:t>
+            </a:r>
+          </a:p>
+        </p:txBody>
+      </p:sp>
+      <p:sp>
+        <p:nvSpPr>
+          <p:cNvPr id="4" name="TextBox 3">
+            <a:extLst>
+              <a:ext uri="{FF2B5EF4-FFF2-40B4-BE49-F238E27FC236}">
+                <a16:creationId xmlns:a16="http://schemas.microsoft.com/office/drawing/2014/main" id="{18B93201-B580-8F45-9FB0-6ADE7776ADE3}"/>
+              </a:ext>
+            </a:extLst>
+          </p:cNvPr>
+          <p:cNvSpPr txBox="1"/>
+          <p:nvPr/>
+        </p:nvSpPr>
+        <p:spPr>
+          <a:xfrm>
+            <a:off x="83127" y="0"/>
+            <a:ext cx="3087585" cy="523220"/>
+          </a:xfrm>
+          <a:prstGeom prst="rect">
+            <a:avLst/>
+          </a:prstGeom>
+          <a:noFill/>
+        </p:spPr>
+        <p:txBody>
+          <a:bodyPr wrap="square" rtlCol="0">
+            <a:spAutoFit/>
+          </a:bodyPr>
+          <a:lstStyle/>
+          <a:p>
+            <a:r>
+              <a:rPr lang="en-US" sz="2800" b="1" dirty="0" err="1"/>
+              <a:t>Inmon</a:t>
+            </a:r>
+            <a:r>
+              <a:rPr lang="en-US" sz="2800" b="1" dirty="0"/>
+              <a:t> vs Kimball </a:t>
+            </a:r>
+          </a:p>
+        </p:txBody>
+      </p:sp>
+    </p:spTree>
+    <p:extLst>
+      <p:ext uri="{BB962C8B-B14F-4D97-AF65-F5344CB8AC3E}">
+        <p14:creationId xmlns:p14="http://schemas.microsoft.com/office/powerpoint/2010/main" val="3750064097"/>
+      </p:ext>
+    </p:extLst>
+  </p:cSld>
+  <p:clrMapOvr>
+    <a:masterClrMapping/>
+  </p:clrMapOvr>
+</p:sld>
+</file>
+
+<file path=ppt/slides/slide4.xml><?xml version="1.0" encoding="utf-8"?>
 <p:sld xmlns:a="http://schemas.openxmlformats.org/drawingml/2006/main" xmlns:r="http://schemas.openxmlformats.org/officeDocument/2006/relationships" xmlns:p="http://schemas.openxmlformats.org/presentationml/2006/main">
   <p:cSld>
     <p:spTree>
@@ -5702,575 +6483,6 @@
 </p:sld>
 </file>
 
-<file path=ppt/slides/slide4.xml><?xml version="1.0" encoding="utf-8"?>
-<p:sld xmlns:a="http://schemas.openxmlformats.org/drawingml/2006/main" xmlns:r="http://schemas.openxmlformats.org/officeDocument/2006/relationships" xmlns:p="http://schemas.openxmlformats.org/presentationml/2006/main">
-  <p:cSld>
-    <p:spTree>
-      <p:nvGrpSpPr>
-        <p:cNvPr id="1" name=""/>
-        <p:cNvGrpSpPr/>
-        <p:nvPr/>
-      </p:nvGrpSpPr>
-      <p:grpSpPr>
-        <a:xfrm>
-          <a:off x="0" y="0"/>
-          <a:ext cx="0" cy="0"/>
-          <a:chOff x="0" y="0"/>
-          <a:chExt cx="0" cy="0"/>
-        </a:xfrm>
-      </p:grpSpPr>
-      <p:sp>
-        <p:nvSpPr>
-          <p:cNvPr id="2" name="TextBox 1">
-            <a:extLst>
-              <a:ext uri="{FF2B5EF4-FFF2-40B4-BE49-F238E27FC236}">
-                <a16:creationId xmlns:a16="http://schemas.microsoft.com/office/drawing/2014/main" id="{1FF97A56-4D4A-3F47-9FFF-C6919AE57058}"/>
-              </a:ext>
-            </a:extLst>
-          </p:cNvPr>
-          <p:cNvSpPr txBox="1"/>
-          <p:nvPr/>
-        </p:nvSpPr>
-        <p:spPr>
-          <a:xfrm>
-            <a:off x="142504" y="118753"/>
-            <a:ext cx="3857995" cy="523220"/>
-          </a:xfrm>
-          <a:prstGeom prst="rect">
-            <a:avLst/>
-          </a:prstGeom>
-          <a:noFill/>
-        </p:spPr>
-        <p:txBody>
-          <a:bodyPr wrap="square" rtlCol="0">
-            <a:spAutoFit/>
-          </a:bodyPr>
-          <a:lstStyle/>
-          <a:p>
-            <a:r>
-              <a:rPr lang="en-US" sz="2800" b="1" dirty="0"/>
-              <a:t>Kimball DW Framework</a:t>
-            </a:r>
-          </a:p>
-        </p:txBody>
-      </p:sp>
-      <p:pic>
-        <p:nvPicPr>
-          <p:cNvPr id="1028" name="Picture 4" descr="Kimball Group | Dimensional Data Warehousing Experts">
-            <a:extLst>
-              <a:ext uri="{FF2B5EF4-FFF2-40B4-BE49-F238E27FC236}">
-                <a16:creationId xmlns:a16="http://schemas.microsoft.com/office/drawing/2014/main" id="{54BE1611-AB11-B843-B335-0B1AD870C097}"/>
-              </a:ext>
-            </a:extLst>
-          </p:cNvPr>
-          <p:cNvPicPr>
-            <a:picLocks noChangeAspect="1" noChangeArrowheads="1"/>
-          </p:cNvPicPr>
-          <p:nvPr/>
-        </p:nvPicPr>
-        <p:blipFill>
-          <a:blip r:embed="rId2" cstate="email">
-            <a:extLst>
-              <a:ext uri="{28A0092B-C50C-407E-A947-70E740481C1C}">
-                <a14:useLocalDpi xmlns:a14="http://schemas.microsoft.com/office/drawing/2010/main"/>
-              </a:ext>
-            </a:extLst>
-          </a:blip>
-          <a:srcRect/>
-          <a:stretch>
-            <a:fillRect/>
-          </a:stretch>
-        </p:blipFill>
-        <p:spPr bwMode="auto">
-          <a:xfrm>
-            <a:off x="2591645" y="781336"/>
-            <a:ext cx="1720112" cy="2013789"/>
-          </a:xfrm>
-          <a:prstGeom prst="rect">
-            <a:avLst/>
-          </a:prstGeom>
-          <a:noFill/>
-          <a:extLst>
-            <a:ext uri="{909E8E84-426E-40DD-AFC4-6F175D3DCCD1}">
-              <a14:hiddenFill xmlns:a14="http://schemas.microsoft.com/office/drawing/2010/main">
-                <a:solidFill>
-                  <a:srgbClr val="FFFFFF"/>
-                </a:solidFill>
-              </a14:hiddenFill>
-            </a:ext>
-          </a:extLst>
-        </p:spPr>
-      </p:pic>
-      <p:sp>
-        <p:nvSpPr>
-          <p:cNvPr id="3" name="TextBox 2">
-            <a:extLst>
-              <a:ext uri="{FF2B5EF4-FFF2-40B4-BE49-F238E27FC236}">
-                <a16:creationId xmlns:a16="http://schemas.microsoft.com/office/drawing/2014/main" id="{CB6AC39B-5121-BE4B-B106-D28C9291FF2B}"/>
-              </a:ext>
-            </a:extLst>
-          </p:cNvPr>
-          <p:cNvSpPr txBox="1"/>
-          <p:nvPr/>
-        </p:nvSpPr>
-        <p:spPr>
-          <a:xfrm>
-            <a:off x="1949557" y="2820188"/>
-            <a:ext cx="2901843" cy="584775"/>
-          </a:xfrm>
-          <a:prstGeom prst="rect">
-            <a:avLst/>
-          </a:prstGeom>
-          <a:noFill/>
-        </p:spPr>
-        <p:txBody>
-          <a:bodyPr wrap="square" rtlCol="0">
-            <a:spAutoFit/>
-          </a:bodyPr>
-          <a:lstStyle/>
-          <a:p>
-            <a:r>
-              <a:rPr lang="en-US" sz="1600" dirty="0"/>
-              <a:t>Kimball Group – closed in 2015</a:t>
-            </a:r>
-          </a:p>
-          <a:p>
-            <a:r>
-              <a:rPr lang="en-US" sz="1600" dirty="0">
-                <a:hlinkClick r:id="rId3"/>
-              </a:rPr>
-              <a:t>https://www.kimballgroup.com/</a:t>
-            </a:r>
-            <a:r>
-              <a:rPr lang="en-US" sz="1600" dirty="0"/>
-              <a:t> </a:t>
-            </a:r>
-          </a:p>
-        </p:txBody>
-      </p:sp>
-      <p:pic>
-        <p:nvPicPr>
-          <p:cNvPr id="1032" name="Picture 8">
-            <a:extLst>
-              <a:ext uri="{FF2B5EF4-FFF2-40B4-BE49-F238E27FC236}">
-                <a16:creationId xmlns:a16="http://schemas.microsoft.com/office/drawing/2014/main" id="{25FB8E3B-0DC1-B943-B985-7D05DDC29557}"/>
-              </a:ext>
-            </a:extLst>
-          </p:cNvPr>
-          <p:cNvPicPr>
-            <a:picLocks noChangeAspect="1" noChangeArrowheads="1"/>
-          </p:cNvPicPr>
-          <p:nvPr/>
-        </p:nvPicPr>
-        <p:blipFill>
-          <a:blip r:embed="rId4" cstate="email">
-            <a:extLst>
-              <a:ext uri="{28A0092B-C50C-407E-A947-70E740481C1C}">
-                <a14:useLocalDpi xmlns:a14="http://schemas.microsoft.com/office/drawing/2010/main"/>
-              </a:ext>
-            </a:extLst>
-          </a:blip>
-          <a:srcRect/>
-          <a:stretch>
-            <a:fillRect/>
-          </a:stretch>
-        </p:blipFill>
-        <p:spPr bwMode="auto">
-          <a:xfrm>
-            <a:off x="142504" y="4160462"/>
-            <a:ext cx="1807053" cy="2277069"/>
-          </a:xfrm>
-          <a:prstGeom prst="rect">
-            <a:avLst/>
-          </a:prstGeom>
-          <a:noFill/>
-          <a:extLst>
-            <a:ext uri="{909E8E84-426E-40DD-AFC4-6F175D3DCCD1}">
-              <a14:hiddenFill xmlns:a14="http://schemas.microsoft.com/office/drawing/2010/main">
-                <a:solidFill>
-                  <a:srgbClr val="FFFFFF"/>
-                </a:solidFill>
-              </a14:hiddenFill>
-            </a:ext>
-          </a:extLst>
-        </p:spPr>
-      </p:pic>
-      <p:pic>
-        <p:nvPicPr>
-          <p:cNvPr id="1034" name="Picture 10" descr="Kimball's Data Warehouse Toolkit Classics, 3 Volume Set">
-            <a:extLst>
-              <a:ext uri="{FF2B5EF4-FFF2-40B4-BE49-F238E27FC236}">
-                <a16:creationId xmlns:a16="http://schemas.microsoft.com/office/drawing/2014/main" id="{E667604D-59E9-1345-9E47-35276E3959DF}"/>
-              </a:ext>
-            </a:extLst>
-          </p:cNvPr>
-          <p:cNvPicPr>
-            <a:picLocks noChangeAspect="1" noChangeArrowheads="1"/>
-          </p:cNvPicPr>
-          <p:nvPr/>
-        </p:nvPicPr>
-        <p:blipFill rotWithShape="1">
-          <a:blip r:embed="rId5" cstate="email">
-            <a:extLst>
-              <a:ext uri="{28A0092B-C50C-407E-A947-70E740481C1C}">
-                <a14:useLocalDpi xmlns:a14="http://schemas.microsoft.com/office/drawing/2010/main"/>
-              </a:ext>
-            </a:extLst>
-          </a:blip>
-          <a:srcRect/>
-          <a:stretch/>
-        </p:blipFill>
-        <p:spPr bwMode="auto">
-          <a:xfrm>
-            <a:off x="2793999" y="4160461"/>
-            <a:ext cx="1842059" cy="2277069"/>
-          </a:xfrm>
-          <a:prstGeom prst="rect">
-            <a:avLst/>
-          </a:prstGeom>
-          <a:noFill/>
-          <a:extLst>
-            <a:ext uri="{909E8E84-426E-40DD-AFC4-6F175D3DCCD1}">
-              <a14:hiddenFill xmlns:a14="http://schemas.microsoft.com/office/drawing/2010/main">
-                <a:solidFill>
-                  <a:srgbClr val="FFFFFF"/>
-                </a:solidFill>
-              </a14:hiddenFill>
-            </a:ext>
-          </a:extLst>
-        </p:spPr>
-      </p:pic>
-      <p:sp>
-        <p:nvSpPr>
-          <p:cNvPr id="9" name="TextBox 8">
-            <a:extLst>
-              <a:ext uri="{FF2B5EF4-FFF2-40B4-BE49-F238E27FC236}">
-                <a16:creationId xmlns:a16="http://schemas.microsoft.com/office/drawing/2014/main" id="{5FE68235-DA87-9642-AF27-C4835BC23BB7}"/>
-              </a:ext>
-            </a:extLst>
-          </p:cNvPr>
-          <p:cNvSpPr txBox="1"/>
-          <p:nvPr/>
-        </p:nvSpPr>
-        <p:spPr>
-          <a:xfrm>
-            <a:off x="8191503" y="118753"/>
-            <a:ext cx="3857995" cy="523220"/>
-          </a:xfrm>
-          <a:prstGeom prst="rect">
-            <a:avLst/>
-          </a:prstGeom>
-          <a:noFill/>
-        </p:spPr>
-        <p:txBody>
-          <a:bodyPr wrap="square" rtlCol="0">
-            <a:spAutoFit/>
-          </a:bodyPr>
-          <a:lstStyle/>
-          <a:p>
-            <a:r>
-              <a:rPr lang="en-US" sz="2800" b="1" dirty="0" err="1"/>
-              <a:t>Inmon</a:t>
-            </a:r>
-            <a:r>
-              <a:rPr lang="en-US" sz="2800" b="1" dirty="0"/>
-              <a:t> DW Framework</a:t>
-            </a:r>
-          </a:p>
-        </p:txBody>
-      </p:sp>
-      <p:pic>
-        <p:nvPicPr>
-          <p:cNvPr id="10" name="Picture 6">
-            <a:extLst>
-              <a:ext uri="{FF2B5EF4-FFF2-40B4-BE49-F238E27FC236}">
-                <a16:creationId xmlns:a16="http://schemas.microsoft.com/office/drawing/2014/main" id="{12840A34-CCB8-574E-9DBC-EFB4880CEADB}"/>
-              </a:ext>
-            </a:extLst>
-          </p:cNvPr>
-          <p:cNvPicPr>
-            <a:picLocks noChangeAspect="1" noChangeArrowheads="1"/>
-          </p:cNvPicPr>
-          <p:nvPr/>
-        </p:nvPicPr>
-        <p:blipFill>
-          <a:blip r:embed="rId6" cstate="email">
-            <a:extLst>
-              <a:ext uri="{28A0092B-C50C-407E-A947-70E740481C1C}">
-                <a14:useLocalDpi xmlns:a14="http://schemas.microsoft.com/office/drawing/2010/main"/>
-              </a:ext>
-            </a:extLst>
-          </a:blip>
-          <a:srcRect/>
-          <a:stretch>
-            <a:fillRect/>
-          </a:stretch>
-        </p:blipFill>
-        <p:spPr bwMode="auto">
-          <a:xfrm>
-            <a:off x="9207500" y="852270"/>
-            <a:ext cx="1249610" cy="1816100"/>
-          </a:xfrm>
-          <a:prstGeom prst="rect">
-            <a:avLst/>
-          </a:prstGeom>
-          <a:noFill/>
-          <a:extLst>
-            <a:ext uri="{909E8E84-426E-40DD-AFC4-6F175D3DCCD1}">
-              <a14:hiddenFill xmlns:a14="http://schemas.microsoft.com/office/drawing/2010/main">
-                <a:solidFill>
-                  <a:srgbClr val="FFFFFF"/>
-                </a:solidFill>
-              </a14:hiddenFill>
-            </a:ext>
-          </a:extLst>
-        </p:spPr>
-      </p:pic>
-      <p:sp>
-        <p:nvSpPr>
-          <p:cNvPr id="11" name="TextBox 10">
-            <a:extLst>
-              <a:ext uri="{FF2B5EF4-FFF2-40B4-BE49-F238E27FC236}">
-                <a16:creationId xmlns:a16="http://schemas.microsoft.com/office/drawing/2014/main" id="{EE04A850-E9C3-DB4B-8CFD-9FC3A00FB0FB}"/>
-              </a:ext>
-            </a:extLst>
-          </p:cNvPr>
-          <p:cNvSpPr txBox="1"/>
-          <p:nvPr/>
-        </p:nvSpPr>
-        <p:spPr>
-          <a:xfrm>
-            <a:off x="8890000" y="2687467"/>
-            <a:ext cx="1905000" cy="584775"/>
-          </a:xfrm>
-          <a:prstGeom prst="rect">
-            <a:avLst/>
-          </a:prstGeom>
-          <a:noFill/>
-        </p:spPr>
-        <p:txBody>
-          <a:bodyPr wrap="square" rtlCol="0">
-            <a:spAutoFit/>
-          </a:bodyPr>
-          <a:lstStyle/>
-          <a:p>
-            <a:pPr algn="ctr"/>
-            <a:r>
-              <a:rPr lang="en-US" sz="1600" dirty="0"/>
-              <a:t>William H. </a:t>
-            </a:r>
-            <a:r>
-              <a:rPr lang="en-US" sz="1600" dirty="0" err="1"/>
-              <a:t>Inmon</a:t>
-            </a:r>
-            <a:endParaRPr lang="en-US" sz="1600" dirty="0"/>
-          </a:p>
-          <a:p>
-            <a:pPr algn="ctr"/>
-            <a:r>
-              <a:rPr lang="en-US" sz="1600" dirty="0"/>
-              <a:t>(1945 – present)</a:t>
-            </a:r>
-          </a:p>
-        </p:txBody>
-      </p:sp>
-      <p:pic>
-        <p:nvPicPr>
-          <p:cNvPr id="12" name="Picture 2">
-            <a:extLst>
-              <a:ext uri="{FF2B5EF4-FFF2-40B4-BE49-F238E27FC236}">
-                <a16:creationId xmlns:a16="http://schemas.microsoft.com/office/drawing/2014/main" id="{415DA38A-988E-0D40-BBF8-D685231221F0}"/>
-              </a:ext>
-            </a:extLst>
-          </p:cNvPr>
-          <p:cNvPicPr>
-            <a:picLocks noChangeAspect="1" noChangeArrowheads="1"/>
-          </p:cNvPicPr>
-          <p:nvPr/>
-        </p:nvPicPr>
-        <p:blipFill>
-          <a:blip r:embed="rId7" cstate="email">
-            <a:extLst>
-              <a:ext uri="{28A0092B-C50C-407E-A947-70E740481C1C}">
-                <a14:useLocalDpi xmlns:a14="http://schemas.microsoft.com/office/drawing/2010/main"/>
-              </a:ext>
-            </a:extLst>
-          </a:blip>
-          <a:srcRect/>
-          <a:stretch>
-            <a:fillRect/>
-          </a:stretch>
-        </p:blipFill>
-        <p:spPr bwMode="auto">
-          <a:xfrm>
-            <a:off x="7964060" y="4160461"/>
-            <a:ext cx="1848980" cy="2277069"/>
-          </a:xfrm>
-          <a:prstGeom prst="rect">
-            <a:avLst/>
-          </a:prstGeom>
-          <a:noFill/>
-          <a:extLst>
-            <a:ext uri="{909E8E84-426E-40DD-AFC4-6F175D3DCCD1}">
-              <a14:hiddenFill xmlns:a14="http://schemas.microsoft.com/office/drawing/2010/main">
-                <a:solidFill>
-                  <a:srgbClr val="FFFFFF"/>
-                </a:solidFill>
-              </a14:hiddenFill>
-            </a:ext>
-          </a:extLst>
-        </p:spPr>
-      </p:pic>
-      <p:pic>
-        <p:nvPicPr>
-          <p:cNvPr id="13" name="Picture 4">
-            <a:extLst>
-              <a:ext uri="{FF2B5EF4-FFF2-40B4-BE49-F238E27FC236}">
-                <a16:creationId xmlns:a16="http://schemas.microsoft.com/office/drawing/2014/main" id="{DA81332F-2F81-5B45-954D-22A2A17F45E3}"/>
-              </a:ext>
-            </a:extLst>
-          </p:cNvPr>
-          <p:cNvPicPr>
-            <a:picLocks noChangeAspect="1" noChangeArrowheads="1"/>
-          </p:cNvPicPr>
-          <p:nvPr/>
-        </p:nvPicPr>
-        <p:blipFill>
-          <a:blip r:embed="rId8" cstate="email">
-            <a:extLst>
-              <a:ext uri="{28A0092B-C50C-407E-A947-70E740481C1C}">
-                <a14:useLocalDpi xmlns:a14="http://schemas.microsoft.com/office/drawing/2010/main"/>
-              </a:ext>
-            </a:extLst>
-          </a:blip>
-          <a:srcRect/>
-          <a:stretch>
-            <a:fillRect/>
-          </a:stretch>
-        </p:blipFill>
-        <p:spPr bwMode="auto">
-          <a:xfrm>
-            <a:off x="10169432" y="4160461"/>
-            <a:ext cx="1743167" cy="2277069"/>
-          </a:xfrm>
-          <a:prstGeom prst="rect">
-            <a:avLst/>
-          </a:prstGeom>
-          <a:noFill/>
-          <a:extLst>
-            <a:ext uri="{909E8E84-426E-40DD-AFC4-6F175D3DCCD1}">
-              <a14:hiddenFill xmlns:a14="http://schemas.microsoft.com/office/drawing/2010/main">
-                <a:solidFill>
-                  <a:srgbClr val="FFFFFF"/>
-                </a:solidFill>
-              </a14:hiddenFill>
-            </a:ext>
-          </a:extLst>
-        </p:spPr>
-      </p:pic>
-      <p:pic>
-        <p:nvPicPr>
-          <p:cNvPr id="1036" name="Picture 12" descr="Ralph Kimball data warehouse architecture">
-            <a:extLst>
-              <a:ext uri="{FF2B5EF4-FFF2-40B4-BE49-F238E27FC236}">
-                <a16:creationId xmlns:a16="http://schemas.microsoft.com/office/drawing/2014/main" id="{4B49ABE2-7BEF-644F-91D4-C8C012C6F9F9}"/>
-              </a:ext>
-            </a:extLst>
-          </p:cNvPr>
-          <p:cNvPicPr>
-            <a:picLocks noChangeAspect="1" noChangeArrowheads="1"/>
-          </p:cNvPicPr>
-          <p:nvPr/>
-        </p:nvPicPr>
-        <p:blipFill>
-          <a:blip r:embed="rId9">
-            <a:extLst>
-              <a:ext uri="{28A0092B-C50C-407E-A947-70E740481C1C}">
-                <a14:useLocalDpi xmlns:a14="http://schemas.microsoft.com/office/drawing/2010/main"/>
-              </a:ext>
-            </a:extLst>
-          </a:blip>
-          <a:srcRect/>
-          <a:stretch>
-            <a:fillRect/>
-          </a:stretch>
-        </p:blipFill>
-        <p:spPr bwMode="auto">
-          <a:xfrm>
-            <a:off x="142504" y="781336"/>
-            <a:ext cx="1592386" cy="2070102"/>
-          </a:xfrm>
-          <a:prstGeom prst="rect">
-            <a:avLst/>
-          </a:prstGeom>
-          <a:noFill/>
-          <a:extLst>
-            <a:ext uri="{909E8E84-426E-40DD-AFC4-6F175D3DCCD1}">
-              <a14:hiddenFill xmlns:a14="http://schemas.microsoft.com/office/drawing/2010/main">
-                <a:solidFill>
-                  <a:srgbClr val="FFFFFF"/>
-                </a:solidFill>
-              </a14:hiddenFill>
-            </a:ext>
-          </a:extLst>
-        </p:spPr>
-      </p:pic>
-      <p:sp>
-        <p:nvSpPr>
-          <p:cNvPr id="15" name="TextBox 14">
-            <a:extLst>
-              <a:ext uri="{FF2B5EF4-FFF2-40B4-BE49-F238E27FC236}">
-                <a16:creationId xmlns:a16="http://schemas.microsoft.com/office/drawing/2014/main" id="{EC47885C-34DB-5E4D-BE91-505AFE558C65}"/>
-              </a:ext>
-            </a:extLst>
-          </p:cNvPr>
-          <p:cNvSpPr txBox="1"/>
-          <p:nvPr/>
-        </p:nvSpPr>
-        <p:spPr>
-          <a:xfrm>
-            <a:off x="34040" y="2851438"/>
-            <a:ext cx="1807053" cy="584775"/>
-          </a:xfrm>
-          <a:prstGeom prst="rect">
-            <a:avLst/>
-          </a:prstGeom>
-          <a:noFill/>
-        </p:spPr>
-        <p:txBody>
-          <a:bodyPr wrap="square" rtlCol="0">
-            <a:spAutoFit/>
-          </a:bodyPr>
-          <a:lstStyle/>
-          <a:p>
-            <a:pPr algn="ctr"/>
-            <a:r>
-              <a:rPr lang="en-US" sz="1600" dirty="0"/>
-              <a:t>Ralph Kimball</a:t>
-            </a:r>
-          </a:p>
-          <a:p>
-            <a:pPr algn="ctr"/>
-            <a:r>
-              <a:rPr lang="en-US" sz="1600" dirty="0"/>
-              <a:t>(1944 – present)</a:t>
-            </a:r>
-          </a:p>
-        </p:txBody>
-      </p:sp>
-    </p:spTree>
-    <p:extLst>
-      <p:ext uri="{BB962C8B-B14F-4D97-AF65-F5344CB8AC3E}">
-        <p14:creationId xmlns:p14="http://schemas.microsoft.com/office/powerpoint/2010/main" val="4190198152"/>
-      </p:ext>
-    </p:extLst>
-  </p:cSld>
-  <p:clrMapOvr>
-    <a:masterClrMapping/>
-  </p:clrMapOvr>
-</p:sld>
-</file>
-
 <file path=ppt/slides/slide5.xml><?xml version="1.0" encoding="utf-8"?>
 <p:sld xmlns:a="http://schemas.openxmlformats.org/drawingml/2006/main" xmlns:r="http://schemas.openxmlformats.org/officeDocument/2006/relationships" xmlns:p="http://schemas.openxmlformats.org/presentationml/2006/main">
   <p:cSld>
@@ -6288,48 +6500,12 @@
           <a:chExt cx="0" cy="0"/>
         </a:xfrm>
       </p:grpSpPr>
-      <p:pic>
-        <p:nvPicPr>
-          <p:cNvPr id="2" name="Picture 1">
-            <a:extLst>
-              <a:ext uri="{FF2B5EF4-FFF2-40B4-BE49-F238E27FC236}">
-                <a16:creationId xmlns:a16="http://schemas.microsoft.com/office/drawing/2014/main" id="{F4626B5A-FFA5-2E46-962E-FE8D97840C15}"/>
-              </a:ext>
-            </a:extLst>
-          </p:cNvPr>
-          <p:cNvPicPr>
-            <a:picLocks noChangeAspect="1"/>
-          </p:cNvPicPr>
-          <p:nvPr/>
-        </p:nvPicPr>
-        <p:blipFill>
-          <a:blip r:embed="rId2" cstate="email">
-            <a:extLst>
-              <a:ext uri="{28A0092B-C50C-407E-A947-70E740481C1C}">
-                <a14:useLocalDpi xmlns:a14="http://schemas.microsoft.com/office/drawing/2010/main"/>
-              </a:ext>
-            </a:extLst>
-          </a:blip>
-          <a:stretch>
-            <a:fillRect/>
-          </a:stretch>
-        </p:blipFill>
-        <p:spPr>
-          <a:xfrm>
-            <a:off x="6096000" y="469900"/>
-            <a:ext cx="5005169" cy="5918200"/>
-          </a:xfrm>
-          <a:prstGeom prst="rect">
-            <a:avLst/>
-          </a:prstGeom>
-        </p:spPr>
-      </p:pic>
-      <p:sp>
-        <p:nvSpPr>
-          <p:cNvPr id="3" name="TextBox 2">
-            <a:extLst>
-              <a:ext uri="{FF2B5EF4-FFF2-40B4-BE49-F238E27FC236}">
-                <a16:creationId xmlns:a16="http://schemas.microsoft.com/office/drawing/2014/main" id="{5A9966EE-FAC1-274E-90CA-F50154FF7E2C}"/>
+      <p:sp>
+        <p:nvSpPr>
+          <p:cNvPr id="4" name="TextBox 3">
+            <a:extLst>
+              <a:ext uri="{FF2B5EF4-FFF2-40B4-BE49-F238E27FC236}">
+                <a16:creationId xmlns:a16="http://schemas.microsoft.com/office/drawing/2014/main" id="{D1E58F78-8F27-2D4A-BD36-154CD23B3E50}"/>
               </a:ext>
             </a:extLst>
           </p:cNvPr>
@@ -6338,8 +6514,8 @@
         </p:nvSpPr>
         <p:spPr>
           <a:xfrm>
-            <a:off x="83127" y="1622688"/>
-            <a:ext cx="5652655" cy="4031873"/>
+            <a:off x="0" y="188301"/>
+            <a:ext cx="5082639" cy="646331"/>
           </a:xfrm>
           <a:prstGeom prst="rect">
             <a:avLst/>
@@ -6352,42 +6528,227 @@
           </a:bodyPr>
           <a:lstStyle/>
           <a:p>
+            <a:pPr algn="ctr"/>
+            <a:r>
+              <a:rPr lang="en-US" sz="3600" b="1" dirty="0"/>
+              <a:t>OLAP Cube – Rise and Fall</a:t>
+            </a:r>
+          </a:p>
+        </p:txBody>
+      </p:sp>
+      <p:sp>
+        <p:nvSpPr>
+          <p:cNvPr id="5" name="TextBox 4">
+            <a:extLst>
+              <a:ext uri="{FF2B5EF4-FFF2-40B4-BE49-F238E27FC236}">
+                <a16:creationId xmlns:a16="http://schemas.microsoft.com/office/drawing/2014/main" id="{9ECF6344-25D1-214F-A75E-373DADD0E10F}"/>
+              </a:ext>
+            </a:extLst>
+          </p:cNvPr>
+          <p:cNvSpPr txBox="1"/>
+          <p:nvPr/>
+        </p:nvSpPr>
+        <p:spPr>
+          <a:xfrm>
+            <a:off x="13086608" y="6543304"/>
+            <a:ext cx="184731" cy="369332"/>
+          </a:xfrm>
+          <a:prstGeom prst="rect">
+            <a:avLst/>
+          </a:prstGeom>
+          <a:noFill/>
+        </p:spPr>
+        <p:txBody>
+          <a:bodyPr wrap="none" rtlCol="0">
+            <a:spAutoFit/>
+          </a:bodyPr>
+          <a:lstStyle/>
+          <a:p>
+            <a:endParaRPr lang="en-US" dirty="0"/>
+          </a:p>
+        </p:txBody>
+      </p:sp>
+      <p:sp>
+        <p:nvSpPr>
+          <p:cNvPr id="6" name="TextBox 5">
+            <a:extLst>
+              <a:ext uri="{FF2B5EF4-FFF2-40B4-BE49-F238E27FC236}">
+                <a16:creationId xmlns:a16="http://schemas.microsoft.com/office/drawing/2014/main" id="{7A5EA9DD-F532-E844-9109-9810BD2F6D66}"/>
+              </a:ext>
+            </a:extLst>
+          </p:cNvPr>
+          <p:cNvSpPr txBox="1"/>
+          <p:nvPr/>
+        </p:nvSpPr>
+        <p:spPr>
+          <a:xfrm>
+            <a:off x="6207450" y="188301"/>
+            <a:ext cx="5082639" cy="738664"/>
+          </a:xfrm>
+          <a:prstGeom prst="rect">
+            <a:avLst/>
+          </a:prstGeom>
+          <a:noFill/>
+        </p:spPr>
+        <p:txBody>
+          <a:bodyPr wrap="square" rtlCol="0">
+            <a:spAutoFit/>
+          </a:bodyPr>
+          <a:lstStyle/>
+          <a:p>
+            <a:r>
+              <a:rPr lang="en-US" sz="1400" dirty="0"/>
+              <a:t>Very good article:</a:t>
+            </a:r>
+          </a:p>
+          <a:p>
+            <a:r>
+              <a:rPr lang="en-US" sz="1400" dirty="0"/>
+              <a:t>The Rise and Fall of the OLAP Cube - by Cedric Chin (2020)</a:t>
+            </a:r>
+          </a:p>
+          <a:p>
+            <a:r>
+              <a:rPr lang="en-US" sz="1400" dirty="0">
+                <a:hlinkClick r:id="rId2"/>
+              </a:rPr>
+              <a:t>https://www.holistics.io/blog/the-rise-and-fall-of-the-olap-cube/</a:t>
+            </a:r>
+            <a:r>
+              <a:rPr lang="en-US" sz="1400" dirty="0"/>
+              <a:t> </a:t>
+            </a:r>
+          </a:p>
+        </p:txBody>
+      </p:sp>
+      <p:sp>
+        <p:nvSpPr>
+          <p:cNvPr id="7" name="TextBox 6">
+            <a:extLst>
+              <a:ext uri="{FF2B5EF4-FFF2-40B4-BE49-F238E27FC236}">
+                <a16:creationId xmlns:a16="http://schemas.microsoft.com/office/drawing/2014/main" id="{76F64F69-1BC7-CC48-841C-6FFCC4154296}"/>
+              </a:ext>
+            </a:extLst>
+          </p:cNvPr>
+          <p:cNvSpPr txBox="1"/>
+          <p:nvPr/>
+        </p:nvSpPr>
+        <p:spPr>
+          <a:xfrm>
+            <a:off x="1030310" y="1464991"/>
+            <a:ext cx="9697791" cy="5262979"/>
+          </a:xfrm>
+          <a:prstGeom prst="rect">
+            <a:avLst/>
+          </a:prstGeom>
+          <a:noFill/>
+        </p:spPr>
+        <p:txBody>
+          <a:bodyPr wrap="square" rtlCol="0">
+            <a:spAutoFit/>
+          </a:bodyPr>
+          <a:lstStyle/>
+          <a:p>
             <a:r>
               <a:rPr lang="en-US" sz="1600" dirty="0"/>
-              <a:t>Ralph Kimball’s paradigm: </a:t>
+              <a:t>Old way of doing things:</a:t>
+            </a:r>
+          </a:p>
+          <a:p>
+            <a:endParaRPr lang="en-US" sz="1600" b="1" dirty="0">
+              <a:solidFill>
+                <a:srgbClr val="0070C0"/>
+              </a:solidFill>
+            </a:endParaRPr>
+          </a:p>
+          <a:p>
+            <a:r>
+              <a:rPr lang="en-US" sz="2000" b="1" dirty="0">
+                <a:solidFill>
+                  <a:srgbClr val="0070C0"/>
+                </a:solidFill>
+              </a:rPr>
+              <a:t>Data</a:t>
+            </a:r>
+            <a:r>
+              <a:rPr lang="en-US" sz="2000" dirty="0"/>
+              <a:t>   </a:t>
+            </a:r>
+            <a:r>
+              <a:rPr lang="en-US" sz="2000" dirty="0">
+                <a:solidFill>
+                  <a:srgbClr val="FF0000"/>
+                </a:solidFill>
+              </a:rPr>
+              <a:t>=&gt;   ETL   =&gt;   Data </a:t>
+            </a:r>
+            <a:r>
+              <a:rPr lang="en-US" sz="2000" dirty="0" err="1">
+                <a:solidFill>
+                  <a:srgbClr val="FF0000"/>
+                </a:solidFill>
+              </a:rPr>
+              <a:t>WareHouse</a:t>
+            </a:r>
+            <a:r>
+              <a:rPr lang="en-US" sz="2000" dirty="0">
+                <a:solidFill>
+                  <a:srgbClr val="FF0000"/>
+                </a:solidFill>
+              </a:rPr>
+              <a:t>   =&gt;   ETL   =&gt;   OLAP Cube   =&gt;  </a:t>
+            </a:r>
+            <a:r>
+              <a:rPr lang="en-US" sz="2000" dirty="0"/>
+              <a:t> </a:t>
+            </a:r>
+            <a:r>
+              <a:rPr lang="en-US" sz="2000" b="1" dirty="0">
+                <a:solidFill>
+                  <a:srgbClr val="0070C0"/>
+                </a:solidFill>
+              </a:rPr>
+              <a:t>Reporting</a:t>
             </a:r>
           </a:p>
           <a:p>
             <a:endParaRPr lang="en-US" sz="1600" dirty="0"/>
+          </a:p>
+          <a:p>
+            <a:endParaRPr lang="en-US" sz="1600" dirty="0"/>
+          </a:p>
+          <a:p>
+            <a:r>
+              <a:rPr lang="en-US" sz="1600" dirty="0"/>
+              <a:t>The above "old way" Includes a lot of ETL, Data modeling &amp; Design:</a:t>
+            </a:r>
           </a:p>
           <a:p>
             <a:pPr marL="285750" indent="-285750">
               <a:buFont typeface="Arial" panose="020B0604020202020204" pitchFamily="34" charset="0"/>
               <a:buChar char="•"/>
             </a:pPr>
-            <a:r>
-              <a:rPr lang="en-US" sz="1600" dirty="0"/>
-              <a:t>Each department in a company has its own </a:t>
-            </a:r>
             <a:r>
               <a:rPr lang="en-US" sz="1600" b="1" dirty="0">
                 <a:solidFill>
                   <a:srgbClr val="FF0000"/>
                 </a:solidFill>
               </a:rPr>
-              <a:t>Data Mart (DM)</a:t>
-            </a:r>
-            <a:r>
-              <a:rPr lang="en-US" sz="1600" dirty="0"/>
-              <a:t>. The company's </a:t>
-            </a:r>
-            <a:r>
-              <a:rPr lang="en-US" sz="1600" b="1" dirty="0"/>
-              <a:t>DW (Data Warehouse)</a:t>
-            </a:r>
-            <a:r>
-              <a:rPr lang="en-US" sz="1600" dirty="0"/>
-              <a:t> is the conglomerate of all </a:t>
+              <a:t>Kimball Framework</a:t>
+            </a:r>
+          </a:p>
+          <a:p>
+            <a:pPr marL="285750" indent="-285750">
+              <a:buFont typeface="Arial" panose="020B0604020202020204" pitchFamily="34" charset="0"/>
+              <a:buChar char="•"/>
+            </a:pPr>
+            <a:r>
+              <a:rPr lang="en-US" sz="1600" b="1" dirty="0" err="1">
+                <a:solidFill>
+                  <a:srgbClr val="FF0000"/>
+                </a:solidFill>
+              </a:rPr>
+              <a:t>Inmon</a:t>
             </a:r>
             <a:r>
               <a:rPr lang="en-US" sz="1600" b="1" dirty="0">
@@ -6395,11 +6756,7 @@
                   <a:srgbClr val="FF0000"/>
                 </a:solidFill>
               </a:rPr>
-              <a:t>DMs</a:t>
-            </a:r>
-            <a:r>
-              <a:rPr lang="en-US" sz="1600" dirty="0"/>
-              <a:t>.</a:t>
+              <a:t> Framework</a:t>
             </a:r>
           </a:p>
           <a:p>
@@ -6409,58 +6766,50 @@
             </a:pPr>
             <a:r>
               <a:rPr lang="en-US" sz="1600" dirty="0"/>
-              <a:t>Information is always stored in the </a:t>
-            </a:r>
-            <a:r>
-              <a:rPr lang="en-US" sz="1600" b="1" dirty="0">
-                <a:solidFill>
-                  <a:srgbClr val="00B050"/>
-                </a:solidFill>
-              </a:rPr>
-              <a:t>dimensional model</a:t>
+              <a:t>Data Vault by Dan </a:t>
+            </a:r>
+            <a:r>
+              <a:rPr lang="en-US" sz="1600" dirty="0" err="1"/>
+              <a:t>Linstedt</a:t>
             </a:r>
             <a:r>
               <a:rPr lang="en-US" sz="1600" dirty="0"/>
-              <a:t>.</a:t>
+              <a:t> (combines Kimball &amp; </a:t>
+            </a:r>
+            <a:r>
+              <a:rPr lang="en-US" sz="1600" dirty="0" err="1"/>
+              <a:t>Inmon</a:t>
+            </a:r>
+            <a:r>
+              <a:rPr lang="en-US" sz="1600" dirty="0"/>
+              <a:t>).</a:t>
             </a:r>
           </a:p>
           <a:p>
             <a:endParaRPr lang="en-US" sz="1600" dirty="0"/>
           </a:p>
           <a:p>
-            <a:endParaRPr lang="en-US" sz="1600" dirty="0"/>
-          </a:p>
-          <a:p>
-            <a:endParaRPr lang="en-US" sz="1600" dirty="0"/>
-          </a:p>
-          <a:p>
-            <a:endParaRPr lang="en-US" sz="1600" dirty="0"/>
-          </a:p>
-          <a:p>
             <a:r>
               <a:rPr lang="en-US" sz="1600" dirty="0"/>
-              <a:t>Bill </a:t>
-            </a:r>
-            <a:r>
-              <a:rPr lang="en-US" sz="1600" dirty="0" err="1"/>
-              <a:t>Inmon’s</a:t>
-            </a:r>
+              <a:t>But imagine that memory and compute power have become so cheap</a:t>
+            </a:r>
+          </a:p>
+          <a:p>
             <a:r>
               <a:rPr lang="en-US" sz="1600" dirty="0"/>
-              <a:t> paradigm: </a:t>
-            </a:r>
-          </a:p>
-          <a:p>
-            <a:endParaRPr lang="en-US" sz="1600" dirty="0"/>
-          </a:p>
-          <a:p>
-            <a:pPr marL="285750" indent="-285750">
-              <a:buFont typeface="Arial" panose="020B0604020202020204" pitchFamily="34" charset="0"/>
-              <a:buChar char="•"/>
-            </a:pPr>
+              <a:t>that your regular SQL database can run any queries very fast </a:t>
+            </a:r>
+          </a:p>
+          <a:p>
             <a:r>
               <a:rPr lang="en-US" sz="1600" dirty="0"/>
-              <a:t>A company has </a:t>
+              <a:t>using in-memory columnar storage </a:t>
+            </a:r>
+          </a:p>
+          <a:p>
+            <a:r>
+              <a:rPr lang="en-US" sz="1600" dirty="0"/>
+              <a:t>and </a:t>
             </a:r>
             <a:r>
               <a:rPr lang="en-US" sz="1600" b="1" dirty="0">
@@ -6468,140 +6817,57 @@
                   <a:srgbClr val="FF0000"/>
                 </a:solidFill>
               </a:rPr>
-              <a:t>one central DW</a:t>
+              <a:t>MPP</a:t>
             </a:r>
             <a:r>
               <a:rPr lang="en-US" sz="1600" dirty="0"/>
-              <a:t> (Data </a:t>
-            </a:r>
-            <a:r>
-              <a:rPr lang="en-US" sz="1600" dirty="0" err="1"/>
-              <a:t>Warehous</a:t>
-            </a:r>
+              <a:t> = Massive Parallel Processing.</a:t>
+            </a:r>
+          </a:p>
+          <a:p>
+            <a:endParaRPr lang="en-US" sz="1600" dirty="0"/>
+          </a:p>
+          <a:p>
             <a:r>
               <a:rPr lang="en-US" sz="1600" dirty="0"/>
-              <a:t>). </a:t>
-            </a:r>
-            <a:br>
+              <a:t>Then you don't need to hire data modelers.</a:t>
+            </a:r>
+          </a:p>
+          <a:p>
+            <a:r>
               <a:rPr lang="en-US" sz="1600" dirty="0"/>
-            </a:br>
+              <a:t>You don't need all the OLAP infrastructure.</a:t>
+            </a:r>
+          </a:p>
+          <a:p>
             <a:r>
               <a:rPr lang="en-US" sz="1600" dirty="0"/>
-              <a:t>Data Marts (</a:t>
-            </a:r>
+              <a:t>You can simply query your data as it is.</a:t>
+            </a:r>
+          </a:p>
+          <a:p>
+            <a:endParaRPr lang="en-US" sz="1600" b="1" dirty="0">
+              <a:solidFill>
+                <a:srgbClr val="0070C0"/>
+              </a:solidFill>
+            </a:endParaRPr>
+          </a:p>
+          <a:p>
             <a:r>
               <a:rPr lang="en-US" sz="1600" b="1" dirty="0">
                 <a:solidFill>
-                  <a:srgbClr val="FF0000"/>
+                  <a:srgbClr val="0070C0"/>
                 </a:solidFill>
               </a:rPr>
-              <a:t>DMs</a:t>
-            </a:r>
-            <a:r>
-              <a:rPr lang="en-US" sz="1600" dirty="0"/>
-              <a:t>) source their data from the </a:t>
-            </a:r>
-            <a:r>
-              <a:rPr lang="en-US" sz="1600" b="1" dirty="0">
+              <a:t>          </a:t>
+            </a:r>
+            <a:r>
+              <a:rPr lang="en-US" sz="2800" b="1" dirty="0">
                 <a:solidFill>
-                  <a:srgbClr val="FF0000"/>
+                  <a:srgbClr val="0070C0"/>
                 </a:solidFill>
               </a:rPr>
-              <a:t>DW</a:t>
-            </a:r>
-            <a:r>
-              <a:rPr lang="en-US" sz="1600" dirty="0"/>
-              <a:t>.  </a:t>
-            </a:r>
-          </a:p>
-          <a:p>
-            <a:pPr marL="285750" indent="-285750">
-              <a:buFont typeface="Arial" panose="020B0604020202020204" pitchFamily="34" charset="0"/>
-              <a:buChar char="•"/>
-            </a:pPr>
-            <a:r>
-              <a:rPr lang="en-US" sz="1600" dirty="0"/>
-              <a:t>In the </a:t>
-            </a:r>
-            <a:r>
-              <a:rPr lang="en-US" sz="1600" b="1" dirty="0">
-                <a:solidFill>
-                  <a:srgbClr val="FF0000"/>
-                </a:solidFill>
-              </a:rPr>
-              <a:t>DW</a:t>
-            </a:r>
-            <a:r>
-              <a:rPr lang="en-US" sz="1600" dirty="0"/>
-              <a:t>, information is stored in </a:t>
-            </a:r>
-            <a:r>
-              <a:rPr lang="en-US" sz="1600" b="1" dirty="0">
-                <a:solidFill>
-                  <a:srgbClr val="00B050"/>
-                </a:solidFill>
-              </a:rPr>
-              <a:t>3rd normal form</a:t>
-            </a:r>
-            <a:r>
-              <a:rPr lang="en-US" sz="1600" dirty="0"/>
-              <a:t>.</a:t>
-            </a:r>
-            <a:br>
-              <a:rPr lang="en-US" sz="1600" dirty="0"/>
-            </a:br>
-            <a:r>
-              <a:rPr lang="en-US" sz="1600" dirty="0"/>
-              <a:t>( </a:t>
-            </a:r>
-            <a:r>
-              <a:rPr lang="en-US" sz="1600" dirty="0">
-                <a:hlinkClick r:id="rId3"/>
-              </a:rPr>
-              <a:t>https://en.wikipedia.org/wiki/Third_normal_form</a:t>
-            </a:r>
-            <a:r>
-              <a:rPr lang="en-US" sz="1600" dirty="0"/>
-              <a:t> )</a:t>
-            </a:r>
-          </a:p>
-        </p:txBody>
-      </p:sp>
-      <p:sp>
-        <p:nvSpPr>
-          <p:cNvPr id="4" name="TextBox 3">
-            <a:extLst>
-              <a:ext uri="{FF2B5EF4-FFF2-40B4-BE49-F238E27FC236}">
-                <a16:creationId xmlns:a16="http://schemas.microsoft.com/office/drawing/2014/main" id="{18B93201-B580-8F45-9FB0-6ADE7776ADE3}"/>
-              </a:ext>
-            </a:extLst>
-          </p:cNvPr>
-          <p:cNvSpPr txBox="1"/>
-          <p:nvPr/>
-        </p:nvSpPr>
-        <p:spPr>
-          <a:xfrm>
-            <a:off x="83127" y="0"/>
-            <a:ext cx="3087585" cy="523220"/>
-          </a:xfrm>
-          <a:prstGeom prst="rect">
-            <a:avLst/>
-          </a:prstGeom>
-          <a:noFill/>
-        </p:spPr>
-        <p:txBody>
-          <a:bodyPr wrap="square" rtlCol="0">
-            <a:spAutoFit/>
-          </a:bodyPr>
-          <a:lstStyle/>
-          <a:p>
-            <a:r>
-              <a:rPr lang="en-US" sz="2800" b="1" dirty="0" err="1"/>
-              <a:t>Inmon</a:t>
-            </a:r>
-            <a:r>
-              <a:rPr lang="en-US" sz="2800" b="1" dirty="0"/>
-              <a:t> vs Kimball </a:t>
+              <a:t>Data   =&gt;   Reporting</a:t>
             </a:r>
           </a:p>
         </p:txBody>
@@ -6609,7 +6875,7 @@
     </p:spTree>
     <p:extLst>
       <p:ext uri="{BB962C8B-B14F-4D97-AF65-F5344CB8AC3E}">
-        <p14:creationId xmlns:p14="http://schemas.microsoft.com/office/powerpoint/2010/main" val="3750064097"/>
+        <p14:creationId xmlns:p14="http://schemas.microsoft.com/office/powerpoint/2010/main" val="410025639"/>
       </p:ext>
     </p:extLst>
   </p:cSld>
@@ -7914,7 +8180,15 @@
             </a:pPr>
             <a:r>
               <a:rPr lang="en-US" sz="1600" dirty="0"/>
-              <a:t>Move from on-prem to cloud</a:t>
+              <a:t>Move from on-prem to </a:t>
+            </a:r>
+            <a:r>
+              <a:rPr lang="en-US" sz="1600" b="1" dirty="0">
+                <a:solidFill>
+                  <a:srgbClr val="FF0000"/>
+                </a:solidFill>
+              </a:rPr>
+              <a:t>cloud</a:t>
             </a:r>
           </a:p>
           <a:p>
@@ -7924,7 +8198,19 @@
             </a:pPr>
             <a:r>
               <a:rPr lang="en-US" sz="1600" dirty="0"/>
-              <a:t>Include all tools for data moving, storing, processing, analysis, and serving</a:t>
+              <a:t>Include </a:t>
+            </a:r>
+            <a:r>
+              <a:rPr lang="en-US" sz="1600" b="1" dirty="0">
+                <a:solidFill>
+                  <a:srgbClr val="FF0000"/>
+                </a:solidFill>
+              </a:rPr>
+              <a:t>all tools</a:t>
+            </a:r>
+            <a:r>
+              <a:rPr lang="en-US" sz="1600" dirty="0"/>
+              <a:t>: data moving, storing, processing, analysis, and serving</a:t>
             </a:r>
           </a:p>
           <a:p>
@@ -7934,7 +8220,19 @@
             </a:pPr>
             <a:r>
               <a:rPr lang="en-US" sz="1600" dirty="0"/>
-              <a:t>All tools are interconnected and work together (</a:t>
+              <a:t>All tools are </a:t>
+            </a:r>
+            <a:r>
+              <a:rPr lang="en-US" sz="1600" b="1" dirty="0">
+                <a:solidFill>
+                  <a:srgbClr val="FF0000"/>
+                </a:solidFill>
+              </a:rPr>
+              <a:t>interconnected and work together</a:t>
+            </a:r>
+            <a:r>
+              <a:rPr lang="en-US" sz="1600" dirty="0"/>
+              <a:t> (</a:t>
             </a:r>
             <a:r>
               <a:rPr lang="en-US" sz="1600" b="1" dirty="0">
@@ -8125,8 +8423,16 @@
               <a:buChar char="•"/>
             </a:pPr>
             <a:r>
+              <a:rPr lang="en-US" sz="1600" b="1" dirty="0">
+                <a:solidFill>
+                  <a:srgbClr val="FF0000"/>
+                </a:solidFill>
+              </a:rPr>
+              <a:t>Multi-component architecture</a:t>
+            </a:r>
+            <a:r>
               <a:rPr lang="en-US" sz="1600" dirty="0"/>
-              <a:t>Multi-component architecture allows for fast and flexible configuration to fit desired results</a:t>
+              <a:t> allows for fast and flexible configuration to fit desired results</a:t>
             </a:r>
           </a:p>
           <a:p>
@@ -8136,7 +8442,15 @@
             </a:pPr>
             <a:r>
               <a:rPr lang="en-US" sz="1600" dirty="0"/>
-              <a:t>Data moving and preparation is fast and scalable</a:t>
+              <a:t>Data moving and preparation is </a:t>
+            </a:r>
+            <a:r>
+              <a:rPr lang="en-US" sz="1600" b="1" dirty="0">
+                <a:solidFill>
+                  <a:srgbClr val="FF0000"/>
+                </a:solidFill>
+              </a:rPr>
+              <a:t>fast and scalable</a:t>
             </a:r>
           </a:p>
           <a:p>
@@ -8146,7 +8460,15 @@
             </a:pPr>
             <a:r>
               <a:rPr lang="en-US" sz="1600" dirty="0"/>
-              <a:t>Speedy and efficient time-to-analytics</a:t>
+              <a:t>Speedy and </a:t>
+            </a:r>
+            <a:r>
+              <a:rPr lang="en-US" sz="1600" b="1" dirty="0">
+                <a:solidFill>
+                  <a:srgbClr val="FF0000"/>
+                </a:solidFill>
+              </a:rPr>
+              <a:t>efficient time-to-analytics</a:t>
             </a:r>
           </a:p>
           <a:p>
@@ -8156,7 +8478,19 @@
             </a:pPr>
             <a:r>
               <a:rPr lang="en-US" sz="1600" dirty="0"/>
-              <a:t>More manageable and customizable cost of ownership</a:t>
+              <a:t>More manageable and customizable </a:t>
+            </a:r>
+            <a:r>
+              <a:rPr lang="en-US" sz="1600" b="1" dirty="0">
+                <a:solidFill>
+                  <a:srgbClr val="FF0000"/>
+                </a:solidFill>
+              </a:rPr>
+              <a:t>cost</a:t>
+            </a:r>
+            <a:r>
+              <a:rPr lang="en-US" sz="1600" dirty="0"/>
+              <a:t> of ownership</a:t>
             </a:r>
           </a:p>
           <a:p>
@@ -8165,8 +8499,16 @@
               <a:buChar char="•"/>
             </a:pPr>
             <a:r>
+              <a:rPr lang="en-US" sz="1600" b="1" dirty="0">
+                <a:solidFill>
+                  <a:srgbClr val="FF0000"/>
+                </a:solidFill>
+              </a:rPr>
+              <a:t>Analytics-driven</a:t>
+            </a:r>
+            <a:r>
               <a:rPr lang="en-US" sz="1600" dirty="0"/>
-              <a:t>Analytics-driven rise in productivity across the organization</a:t>
+              <a:t> rise in productivity across the organization</a:t>
             </a:r>
           </a:p>
           <a:p>
@@ -8185,8 +8527,16 @@
               <a:buChar char="•"/>
             </a:pPr>
             <a:r>
+              <a:rPr lang="en-US" sz="1600" b="1" dirty="0">
+                <a:solidFill>
+                  <a:srgbClr val="FF0000"/>
+                </a:solidFill>
+              </a:rPr>
+              <a:t>Scalable</a:t>
+            </a:r>
+            <a:r>
               <a:rPr lang="en-US" sz="1600" dirty="0"/>
-              <a:t>Scalable from small to large amounts of data</a:t>
+              <a:t> from small to large amounts of data</a:t>
             </a:r>
           </a:p>
         </p:txBody>
@@ -8331,8 +8681,18 @@
               <a:buChar char="•"/>
             </a:pPr>
             <a:r>
+              <a:rPr lang="en-US" sz="1600" b="1" dirty="0">
+                <a:solidFill>
+                  <a:schemeClr val="accent2">
+                    <a:lumMod val="75000"/>
+                  </a:schemeClr>
+                </a:solidFill>
+              </a:rPr>
+              <a:t>Expensive/high-maintenance</a:t>
+            </a:r>
+            <a:r>
               <a:rPr lang="en-US" sz="1600" dirty="0"/>
-              <a:t>Expensive/high-maintenance on-premise server setup</a:t>
+              <a:t> on-premise server setup</a:t>
             </a:r>
           </a:p>
           <a:p>
@@ -8341,8 +8701,18 @@
               <a:buChar char="•"/>
             </a:pPr>
             <a:r>
+              <a:rPr lang="en-US" sz="1600" b="1" dirty="0">
+                <a:solidFill>
+                  <a:schemeClr val="accent2">
+                    <a:lumMod val="75000"/>
+                  </a:schemeClr>
+                </a:solidFill>
+              </a:rPr>
+              <a:t>Rigid structure</a:t>
+            </a:r>
+            <a:r>
               <a:rPr lang="en-US" sz="1600" dirty="0"/>
-              <a:t>Rigid structure relying mostly on scheduled ETL processes</a:t>
+              <a:t> relying mostly on scheduled ETL processes</a:t>
             </a:r>
           </a:p>
           <a:p>
@@ -8351,8 +8721,18 @@
               <a:buChar char="•"/>
             </a:pPr>
             <a:r>
+              <a:rPr lang="en-US" sz="1600" b="1" dirty="0">
+                <a:solidFill>
+                  <a:schemeClr val="accent2">
+                    <a:lumMod val="75000"/>
+                  </a:schemeClr>
+                </a:solidFill>
+              </a:rPr>
+              <a:t>Limited speed</a:t>
+            </a:r>
+            <a:r>
               <a:rPr lang="en-US" sz="1600" dirty="0"/>
-              <a:t>Limited speed potential</a:t>
+              <a:t> potential</a:t>
             </a:r>
           </a:p>
           <a:p>
@@ -8361,8 +8741,18 @@
               <a:buChar char="•"/>
             </a:pPr>
             <a:r>
+              <a:rPr lang="en-US" sz="1600" b="1" dirty="0">
+                <a:solidFill>
+                  <a:schemeClr val="accent2">
+                    <a:lumMod val="75000"/>
+                  </a:schemeClr>
+                </a:solidFill>
+              </a:rPr>
+              <a:t>Expensive upgrades</a:t>
+            </a:r>
+            <a:r>
               <a:rPr lang="en-US" sz="1600" dirty="0"/>
-              <a:t>Upgrades (hardware) are very difficult and expensive</a:t>
+              <a:t> (hardware)</a:t>
             </a:r>
           </a:p>
           <a:p>
@@ -8382,7 +8772,17 @@
             </a:pPr>
             <a:r>
               <a:rPr lang="en-US" sz="1600" dirty="0"/>
-              <a:t>Overall slower and more limited analytical processing</a:t>
+              <a:t>Overall </a:t>
+            </a:r>
+            <a:r>
+              <a:rPr lang="en-US" sz="1600" b="1" dirty="0">
+                <a:solidFill>
+                  <a:schemeClr val="accent2">
+                    <a:lumMod val="75000"/>
+                  </a:schemeClr>
+                </a:solidFill>
+              </a:rPr>
+              <a:t>slower limited analytical processing</a:t>
             </a:r>
           </a:p>
         </p:txBody>
@@ -8503,12 +8903,325 @@
           <a:chExt cx="0" cy="0"/>
         </a:xfrm>
       </p:grpSpPr>
+      <p:sp>
+        <p:nvSpPr>
+          <p:cNvPr id="2" name="TextBox 1">
+            <a:extLst>
+              <a:ext uri="{FF2B5EF4-FFF2-40B4-BE49-F238E27FC236}">
+                <a16:creationId xmlns:a16="http://schemas.microsoft.com/office/drawing/2014/main" id="{A2F735ED-4F38-9D48-B1F3-32471EAB15A3}"/>
+              </a:ext>
+            </a:extLst>
+          </p:cNvPr>
+          <p:cNvSpPr txBox="1"/>
+          <p:nvPr/>
+        </p:nvSpPr>
+        <p:spPr>
+          <a:xfrm>
+            <a:off x="115615" y="168166"/>
+            <a:ext cx="6726619" cy="954107"/>
+          </a:xfrm>
+          <a:prstGeom prst="rect">
+            <a:avLst/>
+          </a:prstGeom>
+          <a:noFill/>
+        </p:spPr>
+        <p:txBody>
+          <a:bodyPr wrap="square" rtlCol="0">
+            <a:spAutoFit/>
+          </a:bodyPr>
+          <a:lstStyle/>
+          <a:p>
+            <a:r>
+              <a:rPr lang="en-US" sz="2800" b="1" dirty="0"/>
+              <a:t>Should we still use a Kimball approach </a:t>
+            </a:r>
+          </a:p>
+          <a:p>
+            <a:r>
+              <a:rPr lang="en-US" sz="2800" b="1" dirty="0"/>
+              <a:t>on a modern data warehouse?</a:t>
+            </a:r>
+          </a:p>
+        </p:txBody>
+      </p:sp>
+      <p:sp>
+        <p:nvSpPr>
+          <p:cNvPr id="4" name="TextBox 3">
+            <a:extLst>
+              <a:ext uri="{FF2B5EF4-FFF2-40B4-BE49-F238E27FC236}">
+                <a16:creationId xmlns:a16="http://schemas.microsoft.com/office/drawing/2014/main" id="{B0CF5460-4E99-B14B-814A-7D9B56C4ADD3}"/>
+              </a:ext>
+            </a:extLst>
+          </p:cNvPr>
+          <p:cNvSpPr txBox="1"/>
+          <p:nvPr/>
+        </p:nvSpPr>
+        <p:spPr>
+          <a:xfrm>
+            <a:off x="115615" y="1511156"/>
+            <a:ext cx="5644056" cy="4770537"/>
+          </a:xfrm>
+          <a:prstGeom prst="rect">
+            <a:avLst/>
+          </a:prstGeom>
+          <a:noFill/>
+        </p:spPr>
+        <p:txBody>
+          <a:bodyPr wrap="square" rtlCol="0">
+            <a:spAutoFit/>
+          </a:bodyPr>
+          <a:lstStyle/>
+          <a:p>
+            <a:r>
+              <a:rPr lang="en-US" sz="1600" b="1" dirty="0">
+                <a:solidFill>
+                  <a:srgbClr val="00B050"/>
+                </a:solidFill>
+              </a:rPr>
+              <a:t>Answer in most cases – yes.</a:t>
+            </a:r>
+          </a:p>
+          <a:p>
+            <a:endParaRPr lang="en-US" sz="1600" b="1" dirty="0">
+              <a:solidFill>
+                <a:srgbClr val="00B050"/>
+              </a:solidFill>
+            </a:endParaRPr>
+          </a:p>
+          <a:p>
+            <a:r>
+              <a:rPr lang="en-US" sz="1600" b="1" dirty="0">
+                <a:solidFill>
+                  <a:srgbClr val="00B050"/>
+                </a:solidFill>
+              </a:rPr>
+              <a:t>Not for performance reason, but for better data maintenance.</a:t>
+            </a:r>
+          </a:p>
+          <a:p>
+            <a:endParaRPr lang="en-US" sz="1600" dirty="0"/>
+          </a:p>
+          <a:p>
+            <a:r>
+              <a:rPr lang="en-US" sz="1600" dirty="0"/>
+              <a:t>Kimball's star schema always had three advantages:</a:t>
+            </a:r>
+          </a:p>
+          <a:p>
+            <a:endParaRPr lang="en-US" sz="1600" dirty="0"/>
+          </a:p>
+          <a:p>
+            <a:pPr marL="171450" indent="-171450">
+              <a:buFont typeface="Arial" panose="020B0604020202020204" pitchFamily="34" charset="0"/>
+              <a:buChar char="•"/>
+            </a:pPr>
+            <a:r>
+              <a:rPr lang="en-US" sz="1600" dirty="0"/>
+              <a:t>takes less storage space – no longer relevant</a:t>
+            </a:r>
+          </a:p>
+          <a:p>
+            <a:pPr marL="171450" indent="-171450">
+              <a:buFont typeface="Arial" panose="020B0604020202020204" pitchFamily="34" charset="0"/>
+              <a:buChar char="•"/>
+            </a:pPr>
+            <a:r>
+              <a:rPr lang="en-US" sz="1600" dirty="0"/>
+              <a:t>performance – no longer relevant</a:t>
+            </a:r>
+          </a:p>
+          <a:p>
+            <a:pPr marL="171450" indent="-171450">
+              <a:buFont typeface="Arial" panose="020B0604020202020204" pitchFamily="34" charset="0"/>
+              <a:buChar char="•"/>
+            </a:pPr>
+            <a:r>
+              <a:rPr lang="en-US" sz="1600" b="1" dirty="0">
+                <a:solidFill>
+                  <a:srgbClr val="FF0000"/>
+                </a:solidFill>
+              </a:rPr>
+              <a:t>data maintenance (loads, updates, restructuring)</a:t>
+            </a:r>
+          </a:p>
+          <a:p>
+            <a:endParaRPr lang="en-US" sz="1600" dirty="0"/>
+          </a:p>
+          <a:p>
+            <a:r>
+              <a:rPr lang="en-US" sz="1600" dirty="0"/>
+              <a:t>Wide denormalized tables can have good performance, </a:t>
+            </a:r>
+          </a:p>
+          <a:p>
+            <a:r>
+              <a:rPr lang="en-US" sz="1600" dirty="0"/>
+              <a:t>but updating a "dimension" field in a denormalized table may require updating millions of records. </a:t>
+            </a:r>
+          </a:p>
+          <a:p>
+            <a:endParaRPr lang="en-US" sz="1600" dirty="0"/>
+          </a:p>
+          <a:p>
+            <a:r>
+              <a:rPr lang="en-US" sz="1600" dirty="0"/>
+              <a:t>Also if we loading data from several different systems, a Kimball approach helps to identify and standardize common dimensions.</a:t>
+            </a:r>
+          </a:p>
+          <a:p>
+            <a:endParaRPr lang="en-US" sz="1600" dirty="0"/>
+          </a:p>
+          <a:p>
+            <a:r>
+              <a:rPr lang="en-US" sz="1600" dirty="0"/>
+              <a:t>Also when implementing dashboards, fact table and dimension tables make queries easier to do.</a:t>
+            </a:r>
+          </a:p>
+        </p:txBody>
+      </p:sp>
+      <p:sp>
+        <p:nvSpPr>
+          <p:cNvPr id="5" name="TextBox 4">
+            <a:extLst>
+              <a:ext uri="{FF2B5EF4-FFF2-40B4-BE49-F238E27FC236}">
+                <a16:creationId xmlns:a16="http://schemas.microsoft.com/office/drawing/2014/main" id="{9068CA5F-16A4-F047-973C-5EB9F25765B0}"/>
+              </a:ext>
+            </a:extLst>
+          </p:cNvPr>
+          <p:cNvSpPr txBox="1"/>
+          <p:nvPr/>
+        </p:nvSpPr>
+        <p:spPr>
+          <a:xfrm>
+            <a:off x="6705600" y="4524582"/>
+            <a:ext cx="5276193" cy="1600438"/>
+          </a:xfrm>
+          <a:prstGeom prst="rect">
+            <a:avLst/>
+          </a:prstGeom>
+          <a:noFill/>
+        </p:spPr>
+        <p:txBody>
+          <a:bodyPr wrap="square" rtlCol="0">
+            <a:spAutoFit/>
+          </a:bodyPr>
+          <a:lstStyle/>
+          <a:p>
+            <a:r>
+              <a:rPr lang="en-US" sz="1400" dirty="0"/>
+              <a:t>Good discussions: </a:t>
+            </a:r>
+          </a:p>
+          <a:p>
+            <a:endParaRPr lang="en-US" sz="1400" dirty="0">
+              <a:hlinkClick r:id="rId2"/>
+            </a:endParaRPr>
+          </a:p>
+          <a:p>
+            <a:r>
+              <a:rPr lang="en-US" sz="1400" dirty="0">
+                <a:hlinkClick r:id="rId2"/>
+              </a:rPr>
+              <a:t>https://discourse.getdbt.com/t/is-kimball-dimensional-modeling-still-relevant-in-a-modern-data-warehouse/225</a:t>
+            </a:r>
+            <a:r>
+              <a:rPr lang="en-US" sz="1400" dirty="0"/>
+              <a:t> </a:t>
+            </a:r>
+          </a:p>
+          <a:p>
+            <a:endParaRPr lang="en-US" sz="1400" dirty="0"/>
+          </a:p>
+          <a:p>
+            <a:r>
+              <a:rPr lang="en-US" sz="1400" dirty="0">
+                <a:hlinkClick r:id="rId3"/>
+              </a:rPr>
+              <a:t>https://www.linkedin.com/pulse/kimball-still-relevant-modern-data-warehouse-simon-whiteley/</a:t>
+            </a:r>
+            <a:r>
+              <a:rPr lang="en-US" sz="1400" dirty="0"/>
+              <a:t> </a:t>
+            </a:r>
+          </a:p>
+        </p:txBody>
+      </p:sp>
+      <p:sp>
+        <p:nvSpPr>
+          <p:cNvPr id="6" name="TextBox 5">
+            <a:extLst>
+              <a:ext uri="{FF2B5EF4-FFF2-40B4-BE49-F238E27FC236}">
+                <a16:creationId xmlns:a16="http://schemas.microsoft.com/office/drawing/2014/main" id="{55E3E6FD-8DD3-CD4A-8202-4D7EB669C6B5}"/>
+              </a:ext>
+            </a:extLst>
+          </p:cNvPr>
+          <p:cNvSpPr txBox="1"/>
+          <p:nvPr/>
+        </p:nvSpPr>
+        <p:spPr>
+          <a:xfrm>
+            <a:off x="7891927" y="229721"/>
+            <a:ext cx="3132083" cy="892552"/>
+          </a:xfrm>
+          <a:prstGeom prst="rect">
+            <a:avLst/>
+          </a:prstGeom>
+          <a:noFill/>
+        </p:spPr>
+        <p:txBody>
+          <a:bodyPr wrap="square" rtlCol="0">
+            <a:spAutoFit/>
+          </a:bodyPr>
+          <a:lstStyle/>
+          <a:p>
+            <a:pPr algn="ctr"/>
+            <a:r>
+              <a:rPr lang="en-US" sz="2000" b="1" dirty="0"/>
+              <a:t>Kimball's "Star Schema"</a:t>
+            </a:r>
+          </a:p>
+          <a:p>
+            <a:pPr algn="ctr"/>
+            <a:r>
+              <a:rPr lang="en-US" sz="1600" b="1" dirty="0">
+                <a:solidFill>
+                  <a:srgbClr val="FF0000"/>
+                </a:solidFill>
+              </a:rPr>
+              <a:t>facts table</a:t>
+            </a:r>
+            <a:r>
+              <a:rPr lang="en-US" sz="1600" dirty="0"/>
+              <a:t> in the middle</a:t>
+            </a:r>
+          </a:p>
+          <a:p>
+            <a:pPr algn="ctr"/>
+            <a:r>
+              <a:rPr lang="en-US" sz="1600" dirty="0"/>
+              <a:t>surrounded by </a:t>
+            </a:r>
+            <a:r>
+              <a:rPr lang="en-US" sz="1600" b="1" dirty="0">
+                <a:solidFill>
+                  <a:srgbClr val="FF0000"/>
+                </a:solidFill>
+              </a:rPr>
+              <a:t>dimensions tables</a:t>
+            </a:r>
+            <a:r>
+              <a:rPr lang="en-US" sz="1600" dirty="0"/>
+              <a:t> </a:t>
+            </a:r>
+          </a:p>
+        </p:txBody>
+      </p:sp>
       <p:pic>
         <p:nvPicPr>
-          <p:cNvPr id="2050" name="Picture 2" descr="IBM Archives: Punched card equipment assembly">
-            <a:extLst>
-              <a:ext uri="{FF2B5EF4-FFF2-40B4-BE49-F238E27FC236}">
-                <a16:creationId xmlns:a16="http://schemas.microsoft.com/office/drawing/2014/main" id="{C206DBE3-B2CA-F846-A23D-43825FEBDF43}"/>
+          <p:cNvPr id="1032" name="Picture 8" descr="No alt text provided for this image">
+            <a:extLst>
+              <a:ext uri="{FF2B5EF4-FFF2-40B4-BE49-F238E27FC236}">
+                <a16:creationId xmlns:a16="http://schemas.microsoft.com/office/drawing/2014/main" id="{8E090A2F-AD3A-C74F-A53A-7DC835E180B0}"/>
               </a:ext>
             </a:extLst>
           </p:cNvPr>
@@ -8518,7 +9231,7 @@
           <p:nvPr/>
         </p:nvPicPr>
         <p:blipFill>
-          <a:blip r:embed="rId2" cstate="email">
+          <a:blip r:embed="rId4" cstate="email">
             <a:extLst>
               <a:ext uri="{28A0092B-C50C-407E-A947-70E740481C1C}">
                 <a14:useLocalDpi xmlns:a14="http://schemas.microsoft.com/office/drawing/2010/main"/>
@@ -8532,8 +9245,8 @@
         </p:blipFill>
         <p:spPr bwMode="auto">
           <a:xfrm>
-            <a:off x="8663719" y="2431473"/>
-            <a:ext cx="3232944" cy="3429000"/>
+            <a:off x="5889342" y="2066925"/>
+            <a:ext cx="6092451" cy="1362075"/>
           </a:xfrm>
           <a:prstGeom prst="rect">
             <a:avLst/>
@@ -8550,217 +9263,10 @@
           </a:extLst>
         </p:spPr>
       </p:pic>
-      <p:pic>
-        <p:nvPicPr>
-          <p:cNvPr id="2052" name="Picture 4" descr="1950s THINK SIGN ON WALL IBM OFFICE INTERIOR MEN WOMEN WORKING EARLY DATA  PROCESSING INSTALLATION INFORMATION SYSTEM TECHNOLOGY - q74730 CPC001 HARS  SPEED FIVE HISTORY FEMALES 5 IBM GROWNUP COMMUNICATING COPY SPACE">
-            <a:extLst>
-              <a:ext uri="{FF2B5EF4-FFF2-40B4-BE49-F238E27FC236}">
-                <a16:creationId xmlns:a16="http://schemas.microsoft.com/office/drawing/2014/main" id="{BD77176E-9245-E84C-8D87-CC4E33817DA6}"/>
-              </a:ext>
-            </a:extLst>
-          </p:cNvPr>
-          <p:cNvPicPr>
-            <a:picLocks noChangeAspect="1" noChangeArrowheads="1"/>
-          </p:cNvPicPr>
-          <p:nvPr/>
-        </p:nvPicPr>
-        <p:blipFill>
-          <a:blip r:embed="rId3" cstate="email">
-            <a:extLst>
-              <a:ext uri="{28A0092B-C50C-407E-A947-70E740481C1C}">
-                <a14:useLocalDpi xmlns:a14="http://schemas.microsoft.com/office/drawing/2010/main"/>
-              </a:ext>
-            </a:extLst>
-          </a:blip>
-          <a:srcRect/>
-          <a:stretch>
-            <a:fillRect/>
-          </a:stretch>
-        </p:blipFill>
-        <p:spPr bwMode="auto">
-          <a:xfrm>
-            <a:off x="4605886" y="1197536"/>
-            <a:ext cx="3807963" cy="3307278"/>
-          </a:xfrm>
-          <a:prstGeom prst="rect">
-            <a:avLst/>
-          </a:prstGeom>
-          <a:noFill/>
-          <a:extLst>
-            <a:ext uri="{909E8E84-426E-40DD-AFC4-6F175D3DCCD1}">
-              <a14:hiddenFill xmlns:a14="http://schemas.microsoft.com/office/drawing/2010/main">
-                <a:solidFill>
-                  <a:srgbClr val="FFFFFF"/>
-                </a:solidFill>
-              </a14:hiddenFill>
-            </a:ext>
-          </a:extLst>
-        </p:spPr>
-      </p:pic>
-      <p:pic>
-        <p:nvPicPr>
-          <p:cNvPr id="4" name="Picture 2" descr="&amp;kcy;&amp;acy;&amp;rcy;&amp;tcy;&amp;icy;&amp;ncy;&amp;kcy;&amp;icy;, &amp;kcy;&amp;ocy;&amp;tcy;&amp;ocy;&amp;rcy;&amp;ycy;&amp;khcy; &amp;tcy;&amp;ycy; &amp;ncy;&amp;iecy; &amp;vcy;&amp;icy;&amp;dcy;&amp;icy;&amp;shcy;&amp;softcy; &amp;vcy; &amp;kcy;&amp;ncy;&amp;icy;&amp;gcy;&amp;acy;&amp;khcy; &amp;pcy;&amp;ocy; &amp;icy;&amp;scy;&amp;tcy;&amp;ocy;&amp;rcy;&amp;icy;&amp;icy;">
-            <a:extLst>
-              <a:ext uri="{FF2B5EF4-FFF2-40B4-BE49-F238E27FC236}">
-                <a16:creationId xmlns:a16="http://schemas.microsoft.com/office/drawing/2014/main" id="{794974E2-DAE6-D345-B7A0-7C460B90F7BF}"/>
-              </a:ext>
-            </a:extLst>
-          </p:cNvPr>
-          <p:cNvPicPr>
-            <a:picLocks noChangeAspect="1" noChangeArrowheads="1"/>
-          </p:cNvPicPr>
-          <p:nvPr/>
-        </p:nvPicPr>
-        <p:blipFill>
-          <a:blip r:embed="rId4" cstate="email">
-            <a:extLst>
-              <a:ext uri="{28A0092B-C50C-407E-A947-70E740481C1C}">
-                <a14:useLocalDpi xmlns:a14="http://schemas.microsoft.com/office/drawing/2010/main"/>
-              </a:ext>
-            </a:extLst>
-          </a:blip>
-          <a:srcRect/>
-          <a:stretch>
-            <a:fillRect/>
-          </a:stretch>
-        </p:blipFill>
-        <p:spPr bwMode="auto">
-          <a:xfrm>
-            <a:off x="295337" y="1197536"/>
-            <a:ext cx="3909744" cy="5179422"/>
-          </a:xfrm>
-          <a:prstGeom prst="rect">
-            <a:avLst/>
-          </a:prstGeom>
-          <a:noFill/>
-          <a:extLst>
-            <a:ext uri="{909E8E84-426E-40DD-AFC4-6F175D3DCCD1}">
-              <a14:hiddenFill xmlns:a14="http://schemas.microsoft.com/office/drawing/2010/main">
-                <a:solidFill>
-                  <a:srgbClr val="FFFFFF"/>
-                </a:solidFill>
-              </a14:hiddenFill>
-            </a:ext>
-          </a:extLst>
-        </p:spPr>
-      </p:pic>
-      <p:sp>
-        <p:nvSpPr>
-          <p:cNvPr id="5" name="TextBox 4">
-            <a:extLst>
-              <a:ext uri="{FF2B5EF4-FFF2-40B4-BE49-F238E27FC236}">
-                <a16:creationId xmlns:a16="http://schemas.microsoft.com/office/drawing/2014/main" id="{77478F8E-CA72-8648-86FF-3CB72A5E33CA}"/>
-              </a:ext>
-            </a:extLst>
-          </p:cNvPr>
-          <p:cNvSpPr txBox="1"/>
-          <p:nvPr/>
-        </p:nvSpPr>
-        <p:spPr>
-          <a:xfrm>
-            <a:off x="703447" y="6431470"/>
-            <a:ext cx="3093524" cy="307777"/>
-          </a:xfrm>
-          <a:prstGeom prst="rect">
-            <a:avLst/>
-          </a:prstGeom>
-          <a:noFill/>
-        </p:spPr>
-        <p:txBody>
-          <a:bodyPr wrap="square" rtlCol="0">
-            <a:spAutoFit/>
-          </a:bodyPr>
-          <a:lstStyle/>
-          <a:p>
-            <a:r>
-              <a:rPr lang="en-US" sz="1400" dirty="0"/>
-              <a:t>1956 – loading 5 MB disk into a plane</a:t>
-            </a:r>
-          </a:p>
-        </p:txBody>
-      </p:sp>
-      <p:sp>
-        <p:nvSpPr>
-          <p:cNvPr id="6" name="TextBox 5">
-            <a:extLst>
-              <a:ext uri="{FF2B5EF4-FFF2-40B4-BE49-F238E27FC236}">
-                <a16:creationId xmlns:a16="http://schemas.microsoft.com/office/drawing/2014/main" id="{A27591C4-9887-5A40-8A55-BDCD8298BDB7}"/>
-              </a:ext>
-            </a:extLst>
-          </p:cNvPr>
-          <p:cNvSpPr txBox="1"/>
-          <p:nvPr/>
-        </p:nvSpPr>
-        <p:spPr>
-          <a:xfrm>
-            <a:off x="142504" y="118753"/>
-            <a:ext cx="1555667" cy="523220"/>
-          </a:xfrm>
-          <a:prstGeom prst="rect">
-            <a:avLst/>
-          </a:prstGeom>
-          <a:noFill/>
-        </p:spPr>
-        <p:txBody>
-          <a:bodyPr wrap="square" rtlCol="0">
-            <a:spAutoFit/>
-          </a:bodyPr>
-          <a:lstStyle/>
-          <a:p>
-            <a:r>
-              <a:rPr lang="en-US" sz="2800" b="1" dirty="0">
-                <a:solidFill>
-                  <a:srgbClr val="00B050"/>
-                </a:solidFill>
-              </a:rPr>
-              <a:t>History</a:t>
-            </a:r>
-          </a:p>
-        </p:txBody>
-      </p:sp>
-      <p:sp>
-        <p:nvSpPr>
-          <p:cNvPr id="7" name="TextBox 6">
-            <a:extLst>
-              <a:ext uri="{FF2B5EF4-FFF2-40B4-BE49-F238E27FC236}">
-                <a16:creationId xmlns:a16="http://schemas.microsoft.com/office/drawing/2014/main" id="{9C549E25-D057-EB42-BE03-9BB2C6CEE1E4}"/>
-              </a:ext>
-            </a:extLst>
-          </p:cNvPr>
-          <p:cNvSpPr txBox="1"/>
-          <p:nvPr/>
-        </p:nvSpPr>
-        <p:spPr>
-          <a:xfrm>
-            <a:off x="7108051" y="380363"/>
-            <a:ext cx="4612893" cy="523220"/>
-          </a:xfrm>
-          <a:prstGeom prst="rect">
-            <a:avLst/>
-          </a:prstGeom>
-          <a:noFill/>
-        </p:spPr>
-        <p:txBody>
-          <a:bodyPr wrap="square" rtlCol="0">
-            <a:spAutoFit/>
-          </a:bodyPr>
-          <a:lstStyle/>
-          <a:p>
-            <a:r>
-              <a:rPr lang="en-US" sz="2800" b="1" dirty="0">
-                <a:solidFill>
-                  <a:srgbClr val="00B050"/>
-                </a:solidFill>
-              </a:rPr>
-              <a:t>IBM – Punch-Cards in 1950s</a:t>
-            </a:r>
-          </a:p>
-        </p:txBody>
-      </p:sp>
     </p:spTree>
     <p:extLst>
       <p:ext uri="{BB962C8B-B14F-4D97-AF65-F5344CB8AC3E}">
-        <p14:creationId xmlns:p14="http://schemas.microsoft.com/office/powerpoint/2010/main" val="2777219784"/>
+        <p14:creationId xmlns:p14="http://schemas.microsoft.com/office/powerpoint/2010/main" val="2920878323"/>
       </p:ext>
     </p:extLst>
   </p:cSld>
@@ -8787,51 +9293,12 @@
           <a:chExt cx="0" cy="0"/>
         </a:xfrm>
       </p:grpSpPr>
-      <p:sp>
-        <p:nvSpPr>
-          <p:cNvPr id="2" name="TextBox 1">
-            <a:extLst>
-              <a:ext uri="{FF2B5EF4-FFF2-40B4-BE49-F238E27FC236}">
-                <a16:creationId xmlns:a16="http://schemas.microsoft.com/office/drawing/2014/main" id="{2B91F5F7-146D-574B-ACB0-83F0C70FE549}"/>
-              </a:ext>
-            </a:extLst>
-          </p:cNvPr>
-          <p:cNvSpPr txBox="1"/>
-          <p:nvPr/>
-        </p:nvSpPr>
-        <p:spPr>
-          <a:xfrm>
-            <a:off x="142504" y="118753"/>
-            <a:ext cx="2778826" cy="523220"/>
-          </a:xfrm>
-          <a:prstGeom prst="rect">
-            <a:avLst/>
-          </a:prstGeom>
-          <a:noFill/>
-        </p:spPr>
-        <p:txBody>
-          <a:bodyPr wrap="square" rtlCol="0">
-            <a:spAutoFit/>
-          </a:bodyPr>
-          <a:lstStyle/>
-          <a:p>
-            <a:r>
-              <a:rPr lang="en-US" sz="2800" b="1" dirty="0">
-                <a:solidFill>
-                  <a:srgbClr val="00B050"/>
-                </a:solidFill>
-              </a:rPr>
-              <a:t>History - Unix</a:t>
-            </a:r>
-          </a:p>
-        </p:txBody>
-      </p:sp>
       <p:pic>
         <p:nvPicPr>
-          <p:cNvPr id="1028" name="Picture 4">
-            <a:extLst>
-              <a:ext uri="{FF2B5EF4-FFF2-40B4-BE49-F238E27FC236}">
-                <a16:creationId xmlns:a16="http://schemas.microsoft.com/office/drawing/2014/main" id="{78FAF3C8-1776-EE44-8C5C-DCB0F4D25CC7}"/>
+          <p:cNvPr id="2050" name="Picture 2" descr="IBM Archives: Punched card equipment assembly">
+            <a:extLst>
+              <a:ext uri="{FF2B5EF4-FFF2-40B4-BE49-F238E27FC236}">
+                <a16:creationId xmlns:a16="http://schemas.microsoft.com/office/drawing/2014/main" id="{C206DBE3-B2CA-F846-A23D-43825FEBDF43}"/>
               </a:ext>
             </a:extLst>
           </p:cNvPr>
@@ -8855,8 +9322,8 @@
         </p:blipFill>
         <p:spPr bwMode="auto">
           <a:xfrm>
-            <a:off x="5219536" y="1068037"/>
-            <a:ext cx="4140200" cy="3314700"/>
+            <a:off x="8663719" y="2431473"/>
+            <a:ext cx="3232944" cy="3429000"/>
           </a:xfrm>
           <a:prstGeom prst="rect">
             <a:avLst/>
@@ -8873,65 +9340,12 @@
           </a:extLst>
         </p:spPr>
       </p:pic>
-      <p:sp>
-        <p:nvSpPr>
-          <p:cNvPr id="3" name="TextBox 2">
-            <a:extLst>
-              <a:ext uri="{FF2B5EF4-FFF2-40B4-BE49-F238E27FC236}">
-                <a16:creationId xmlns:a16="http://schemas.microsoft.com/office/drawing/2014/main" id="{BA4C09F8-8AA8-6A4F-B793-A40EA71DD0E4}"/>
-              </a:ext>
-            </a:extLst>
-          </p:cNvPr>
-          <p:cNvSpPr txBox="1"/>
-          <p:nvPr/>
-        </p:nvSpPr>
-        <p:spPr>
-          <a:xfrm>
-            <a:off x="5211166" y="4418362"/>
-            <a:ext cx="5179743" cy="707886"/>
-          </a:xfrm>
-          <a:prstGeom prst="rect">
-            <a:avLst/>
-          </a:prstGeom>
-          <a:noFill/>
-        </p:spPr>
-        <p:txBody>
-          <a:bodyPr wrap="square" rtlCol="0">
-            <a:spAutoFit/>
-          </a:bodyPr>
-          <a:lstStyle/>
-          <a:p>
-            <a:r>
-              <a:rPr lang="en-US" sz="1400" dirty="0"/>
-              <a:t>Ken Thompson (seated) and Dennis Ritchie (standing) </a:t>
-            </a:r>
-          </a:p>
-          <a:p>
-            <a:r>
-              <a:rPr lang="en-US" sz="1400" dirty="0"/>
-              <a:t>at a PDP-11 in 1972.</a:t>
-            </a:r>
-          </a:p>
-          <a:p>
-            <a:r>
-              <a:rPr lang="en-US" sz="1200" dirty="0">
-                <a:hlinkClick r:id="rId3"/>
-              </a:rPr>
-              <a:t>https://homepage.cs.uri.edu/~thenry/resources/unix_art/ch02s01.html</a:t>
-            </a:r>
-            <a:r>
-              <a:rPr lang="en-US" sz="1200" dirty="0"/>
-              <a:t> </a:t>
-            </a:r>
-          </a:p>
-        </p:txBody>
-      </p:sp>
       <p:pic>
         <p:nvPicPr>
-          <p:cNvPr id="1030" name="Picture 6" descr="The PDP-7.">
-            <a:extLst>
-              <a:ext uri="{FF2B5EF4-FFF2-40B4-BE49-F238E27FC236}">
-                <a16:creationId xmlns:a16="http://schemas.microsoft.com/office/drawing/2014/main" id="{5741A8A5-199A-794A-834E-BB94F49FF0B5}"/>
+          <p:cNvPr id="2052" name="Picture 4" descr="1950s THINK SIGN ON WALL IBM OFFICE INTERIOR MEN WOMEN WORKING EARLY DATA  PROCESSING INSTALLATION INFORMATION SYSTEM TECHNOLOGY - q74730 CPC001 HARS  SPEED FIVE HISTORY FEMALES 5 IBM GROWNUP COMMUNICATING COPY SPACE">
+            <a:extLst>
+              <a:ext uri="{FF2B5EF4-FFF2-40B4-BE49-F238E27FC236}">
+                <a16:creationId xmlns:a16="http://schemas.microsoft.com/office/drawing/2014/main" id="{BD77176E-9245-E84C-8D87-CC4E33817DA6}"/>
               </a:ext>
             </a:extLst>
           </p:cNvPr>
@@ -8941,7 +9355,7 @@
           <p:nvPr/>
         </p:nvPicPr>
         <p:blipFill>
-          <a:blip r:embed="rId4" cstate="email">
+          <a:blip r:embed="rId3" cstate="email">
             <a:extLst>
               <a:ext uri="{28A0092B-C50C-407E-A947-70E740481C1C}">
                 <a14:useLocalDpi xmlns:a14="http://schemas.microsoft.com/office/drawing/2010/main"/>
@@ -8955,8 +9369,8 @@
         </p:blipFill>
         <p:spPr bwMode="auto">
           <a:xfrm>
-            <a:off x="529978" y="1068037"/>
-            <a:ext cx="3543257" cy="4349778"/>
+            <a:off x="4605886" y="1197536"/>
+            <a:ext cx="3807963" cy="3307278"/>
           </a:xfrm>
           <a:prstGeom prst="rect">
             <a:avLst/>
@@ -8973,27 +9387,74 @@
           </a:extLst>
         </p:spPr>
       </p:pic>
-      <p:sp>
-        <p:nvSpPr>
-          <p:cNvPr id="8" name="TextBox 7">
-            <a:extLst>
-              <a:ext uri="{FF2B5EF4-FFF2-40B4-BE49-F238E27FC236}">
-                <a16:creationId xmlns:a16="http://schemas.microsoft.com/office/drawing/2014/main" id="{3B7D39AD-491E-9C47-9C8D-470771084901}"/>
-              </a:ext>
-            </a:extLst>
-          </p:cNvPr>
-          <p:cNvSpPr txBox="1"/>
+      <p:pic>
+        <p:nvPicPr>
+          <p:cNvPr id="4" name="Picture 2" descr="&amp;kcy;&amp;acy;&amp;rcy;&amp;tcy;&amp;icy;&amp;ncy;&amp;kcy;&amp;icy;, &amp;kcy;&amp;ocy;&amp;tcy;&amp;ocy;&amp;rcy;&amp;ycy;&amp;khcy; &amp;tcy;&amp;ycy; &amp;ncy;&amp;iecy; &amp;vcy;&amp;icy;&amp;dcy;&amp;icy;&amp;shcy;&amp;softcy; &amp;vcy; &amp;kcy;&amp;ncy;&amp;icy;&amp;gcy;&amp;acy;&amp;khcy; &amp;pcy;&amp;ocy; &amp;icy;&amp;scy;&amp;tcy;&amp;ocy;&amp;rcy;&amp;icy;&amp;icy;">
+            <a:extLst>
+              <a:ext uri="{FF2B5EF4-FFF2-40B4-BE49-F238E27FC236}">
+                <a16:creationId xmlns:a16="http://schemas.microsoft.com/office/drawing/2014/main" id="{794974E2-DAE6-D345-B7A0-7C460B90F7BF}"/>
+              </a:ext>
+            </a:extLst>
+          </p:cNvPr>
+          <p:cNvPicPr>
+            <a:picLocks noChangeAspect="1" noChangeArrowheads="1"/>
+          </p:cNvPicPr>
           <p:nvPr/>
-        </p:nvSpPr>
-        <p:spPr>
-          <a:xfrm>
-            <a:off x="529978" y="5572195"/>
-            <a:ext cx="3543257" cy="738664"/>
+        </p:nvPicPr>
+        <p:blipFill>
+          <a:blip r:embed="rId4" cstate="email">
+            <a:extLst>
+              <a:ext uri="{28A0092B-C50C-407E-A947-70E740481C1C}">
+                <a14:useLocalDpi xmlns:a14="http://schemas.microsoft.com/office/drawing/2010/main"/>
+              </a:ext>
+            </a:extLst>
+          </a:blip>
+          <a:srcRect/>
+          <a:stretch>
+            <a:fillRect/>
+          </a:stretch>
+        </p:blipFill>
+        <p:spPr bwMode="auto">
+          <a:xfrm>
+            <a:off x="295337" y="1197536"/>
+            <a:ext cx="3909744" cy="5179422"/>
           </a:xfrm>
           <a:prstGeom prst="rect">
             <a:avLst/>
           </a:prstGeom>
           <a:noFill/>
+          <a:extLst>
+            <a:ext uri="{909E8E84-426E-40DD-AFC4-6F175D3DCCD1}">
+              <a14:hiddenFill xmlns:a14="http://schemas.microsoft.com/office/drawing/2010/main">
+                <a:solidFill>
+                  <a:srgbClr val="FFFFFF"/>
+                </a:solidFill>
+              </a14:hiddenFill>
+            </a:ext>
+          </a:extLst>
+        </p:spPr>
+      </p:pic>
+      <p:sp>
+        <p:nvSpPr>
+          <p:cNvPr id="5" name="TextBox 4">
+            <a:extLst>
+              <a:ext uri="{FF2B5EF4-FFF2-40B4-BE49-F238E27FC236}">
+                <a16:creationId xmlns:a16="http://schemas.microsoft.com/office/drawing/2014/main" id="{77478F8E-CA72-8648-86FF-3CB72A5E33CA}"/>
+              </a:ext>
+            </a:extLst>
+          </p:cNvPr>
+          <p:cNvSpPr txBox="1"/>
+          <p:nvPr/>
+        </p:nvSpPr>
+        <p:spPr>
+          <a:xfrm>
+            <a:off x="703447" y="6431470"/>
+            <a:ext cx="3093524" cy="307777"/>
+          </a:xfrm>
+          <a:prstGeom prst="rect">
+            <a:avLst/>
+          </a:prstGeom>
+          <a:noFill/>
         </p:spPr>
         <p:txBody>
           <a:bodyPr wrap="square" rtlCol="0">
@@ -9003,13 +9464,85 @@
           <a:p>
             <a:r>
               <a:rPr lang="en-US" sz="1400" dirty="0"/>
-              <a:t>PDP-7 minicomputer (1969) on which Ken Thompson created the Space Travel game </a:t>
-            </a:r>
-          </a:p>
-          <a:p>
-            <a:r>
-              <a:rPr lang="en-US" sz="1400" dirty="0"/>
-              <a:t>and Unix OS</a:t>
+              <a:t>1956 – loading 5 MB disk into a plane</a:t>
+            </a:r>
+          </a:p>
+        </p:txBody>
+      </p:sp>
+      <p:sp>
+        <p:nvSpPr>
+          <p:cNvPr id="6" name="TextBox 5">
+            <a:extLst>
+              <a:ext uri="{FF2B5EF4-FFF2-40B4-BE49-F238E27FC236}">
+                <a16:creationId xmlns:a16="http://schemas.microsoft.com/office/drawing/2014/main" id="{A27591C4-9887-5A40-8A55-BDCD8298BDB7}"/>
+              </a:ext>
+            </a:extLst>
+          </p:cNvPr>
+          <p:cNvSpPr txBox="1"/>
+          <p:nvPr/>
+        </p:nvSpPr>
+        <p:spPr>
+          <a:xfrm>
+            <a:off x="142504" y="118753"/>
+            <a:ext cx="1555667" cy="523220"/>
+          </a:xfrm>
+          <a:prstGeom prst="rect">
+            <a:avLst/>
+          </a:prstGeom>
+          <a:noFill/>
+        </p:spPr>
+        <p:txBody>
+          <a:bodyPr wrap="square" rtlCol="0">
+            <a:spAutoFit/>
+          </a:bodyPr>
+          <a:lstStyle/>
+          <a:p>
+            <a:r>
+              <a:rPr lang="en-US" sz="2800" b="1" dirty="0">
+                <a:solidFill>
+                  <a:srgbClr val="00B050"/>
+                </a:solidFill>
+              </a:rPr>
+              <a:t>History</a:t>
+            </a:r>
+          </a:p>
+        </p:txBody>
+      </p:sp>
+      <p:sp>
+        <p:nvSpPr>
+          <p:cNvPr id="7" name="TextBox 6">
+            <a:extLst>
+              <a:ext uri="{FF2B5EF4-FFF2-40B4-BE49-F238E27FC236}">
+                <a16:creationId xmlns:a16="http://schemas.microsoft.com/office/drawing/2014/main" id="{9C549E25-D057-EB42-BE03-9BB2C6CEE1E4}"/>
+              </a:ext>
+            </a:extLst>
+          </p:cNvPr>
+          <p:cNvSpPr txBox="1"/>
+          <p:nvPr/>
+        </p:nvSpPr>
+        <p:spPr>
+          <a:xfrm>
+            <a:off x="7108051" y="380363"/>
+            <a:ext cx="4612893" cy="523220"/>
+          </a:xfrm>
+          <a:prstGeom prst="rect">
+            <a:avLst/>
+          </a:prstGeom>
+          <a:noFill/>
+        </p:spPr>
+        <p:txBody>
+          <a:bodyPr wrap="square" rtlCol="0">
+            <a:spAutoFit/>
+          </a:bodyPr>
+          <a:lstStyle/>
+          <a:p>
+            <a:r>
+              <a:rPr lang="en-US" sz="2800" b="1" dirty="0">
+                <a:solidFill>
+                  <a:srgbClr val="00B050"/>
+                </a:solidFill>
+              </a:rPr>
+              <a:t>IBM – Punch-Cards in 1950s</a:t>
             </a:r>
           </a:p>
         </p:txBody>
@@ -9017,7 +9550,7 @@
     </p:spTree>
     <p:extLst>
       <p:ext uri="{BB962C8B-B14F-4D97-AF65-F5344CB8AC3E}">
-        <p14:creationId xmlns:p14="http://schemas.microsoft.com/office/powerpoint/2010/main" val="172540453"/>
+        <p14:creationId xmlns:p14="http://schemas.microsoft.com/office/powerpoint/2010/main" val="2777219784"/>
       </p:ext>
     </p:extLst>
   </p:cSld>
